--- a/research/ppt/progress_week1.pptx
+++ b/research/ppt/progress_week1.pptx
@@ -122,6 +122,550 @@
     </p:ext>
   </p:extLst>
 </p:presentation>
+</file>
+
+<file path=ppt/notesMasters/notesMaster1.xml><?xml version="1.0" encoding="utf-8"?>
+<p:notesMaster xmlns:a="http://schemas.openxmlformats.org/drawingml/2006/main" xmlns:p="http://schemas.openxmlformats.org/presentationml/2006/main" xmlns:r="http://schemas.openxmlformats.org/officeDocument/2006/relationships">
+  <p:cSld>
+    <p:bg>
+      <p:bgRef idx="1001">
+        <a:schemeClr val="bg1"/>
+      </p:bgRef>
+    </p:bg>
+    <p:spTree>
+      <p:nvGrpSpPr>
+        <p:cNvPr id="1" name=""/>
+        <p:cNvGrpSpPr/>
+        <p:nvPr/>
+      </p:nvGrpSpPr>
+      <p:grpSpPr>
+        <a:xfrm>
+          <a:off x="0" y="0"/>
+          <a:ext cx="0" cy="0"/>
+          <a:chOff x="0" y="0"/>
+          <a:chExt cx="0" cy="0"/>
+        </a:xfrm>
+      </p:grpSpPr>
+      <p:sp>
+        <p:nvSpPr>
+          <p:cNvPr id="2" name="Header Placeholder 1"/>
+          <p:cNvSpPr>
+            <a:spLocks noGrp="1"/>
+          </p:cNvSpPr>
+          <p:nvPr>
+            <p:ph type="hdr" sz="quarter"/>
+          </p:nvPr>
+        </p:nvSpPr>
+        <p:spPr>
+          <a:xfrm>
+            <a:off x="0" y="0"/>
+            <a:ext cx="2971800" cy="457200"/>
+          </a:xfrm>
+          <a:prstGeom prst="rect">
+            <a:avLst/>
+          </a:prstGeom>
+        </p:spPr>
+        <p:txBody>
+          <a:bodyPr vert="horz" lIns="91440" tIns="45720" rIns="91440" bIns="45720" rtlCol="0"/>
+          <a:lstStyle>
+            <a:lvl1pPr algn="l">
+              <a:defRPr sz="1200"/>
+            </a:lvl1pPr>
+          </a:lstStyle>
+          <a:p>
+            <a:endParaRPr lang="en-US"/>
+          </a:p>
+        </p:txBody>
+      </p:sp>
+      <p:sp>
+        <p:nvSpPr>
+          <p:cNvPr id="3" name="Date Placeholder 2"/>
+          <p:cNvSpPr>
+            <a:spLocks noGrp="1"/>
+          </p:cNvSpPr>
+          <p:nvPr>
+            <p:ph type="dt" idx="1"/>
+          </p:nvPr>
+        </p:nvSpPr>
+        <p:spPr>
+          <a:xfrm>
+            <a:off x="3884613" y="0"/>
+            <a:ext cx="2971800" cy="457200"/>
+          </a:xfrm>
+          <a:prstGeom prst="rect">
+            <a:avLst/>
+          </a:prstGeom>
+        </p:spPr>
+        <p:txBody>
+          <a:bodyPr vert="horz" lIns="91440" tIns="45720" rIns="91440" bIns="45720" rtlCol="0"/>
+          <a:lstStyle>
+            <a:lvl1pPr algn="r">
+              <a:defRPr sz="1200"/>
+            </a:lvl1pPr>
+          </a:lstStyle>
+          <a:p>
+            <a:fld id="{0F89C1C7-3DCD-1040-A9CF-14679D8B5DDD}" type="datetimeFigureOut">
+              <a:rPr lang="en-US" smtClean="0"/>
+              <a:t>10/17/16</a:t>
+            </a:fld>
+            <a:endParaRPr lang="en-US"/>
+          </a:p>
+        </p:txBody>
+      </p:sp>
+      <p:sp>
+        <p:nvSpPr>
+          <p:cNvPr id="4" name="Slide Image Placeholder 3"/>
+          <p:cNvSpPr>
+            <a:spLocks noGrp="1" noRot="1" noChangeAspect="1"/>
+          </p:cNvSpPr>
+          <p:nvPr>
+            <p:ph type="sldImg" idx="2"/>
+          </p:nvPr>
+        </p:nvSpPr>
+        <p:spPr>
+          <a:xfrm>
+            <a:off x="1143000" y="685800"/>
+            <a:ext cx="4572000" cy="3429000"/>
+          </a:xfrm>
+          <a:prstGeom prst="rect">
+            <a:avLst/>
+          </a:prstGeom>
+          <a:noFill/>
+          <a:ln w="12700">
+            <a:solidFill>
+              <a:prstClr val="black"/>
+            </a:solidFill>
+          </a:ln>
+        </p:spPr>
+        <p:txBody>
+          <a:bodyPr vert="horz" lIns="91440" tIns="45720" rIns="91440" bIns="45720" rtlCol="0" anchor="ctr"/>
+          <a:lstStyle/>
+          <a:p>
+            <a:endParaRPr lang="en-US"/>
+          </a:p>
+        </p:txBody>
+      </p:sp>
+      <p:sp>
+        <p:nvSpPr>
+          <p:cNvPr id="5" name="Notes Placeholder 4"/>
+          <p:cNvSpPr>
+            <a:spLocks noGrp="1"/>
+          </p:cNvSpPr>
+          <p:nvPr>
+            <p:ph type="body" sz="quarter" idx="3"/>
+          </p:nvPr>
+        </p:nvSpPr>
+        <p:spPr>
+          <a:xfrm>
+            <a:off x="685800" y="4343400"/>
+            <a:ext cx="5486400" cy="4114800"/>
+          </a:xfrm>
+          <a:prstGeom prst="rect">
+            <a:avLst/>
+          </a:prstGeom>
+        </p:spPr>
+        <p:txBody>
+          <a:bodyPr vert="horz" lIns="91440" tIns="45720" rIns="91440" bIns="45720" rtlCol="0"/>
+          <a:lstStyle/>
+          <a:p>
+            <a:pPr lvl="0"/>
+            <a:r>
+              <a:rPr lang="en-US" smtClean="0"/>
+              <a:t>Click to edit Master text styles</a:t>
+            </a:r>
+          </a:p>
+          <a:p>
+            <a:pPr lvl="1"/>
+            <a:r>
+              <a:rPr lang="en-US" smtClean="0"/>
+              <a:t>Second level</a:t>
+            </a:r>
+          </a:p>
+          <a:p>
+            <a:pPr lvl="2"/>
+            <a:r>
+              <a:rPr lang="en-US" smtClean="0"/>
+              <a:t>Third level</a:t>
+            </a:r>
+          </a:p>
+          <a:p>
+            <a:pPr lvl="3"/>
+            <a:r>
+              <a:rPr lang="en-US" smtClean="0"/>
+              <a:t>Fourth level</a:t>
+            </a:r>
+          </a:p>
+          <a:p>
+            <a:pPr lvl="4"/>
+            <a:r>
+              <a:rPr lang="en-US" smtClean="0"/>
+              <a:t>Fifth level</a:t>
+            </a:r>
+            <a:endParaRPr lang="en-US"/>
+          </a:p>
+        </p:txBody>
+      </p:sp>
+      <p:sp>
+        <p:nvSpPr>
+          <p:cNvPr id="6" name="Footer Placeholder 5"/>
+          <p:cNvSpPr>
+            <a:spLocks noGrp="1"/>
+          </p:cNvSpPr>
+          <p:nvPr>
+            <p:ph type="ftr" sz="quarter" idx="4"/>
+          </p:nvPr>
+        </p:nvSpPr>
+        <p:spPr>
+          <a:xfrm>
+            <a:off x="0" y="8685213"/>
+            <a:ext cx="2971800" cy="457200"/>
+          </a:xfrm>
+          <a:prstGeom prst="rect">
+            <a:avLst/>
+          </a:prstGeom>
+        </p:spPr>
+        <p:txBody>
+          <a:bodyPr vert="horz" lIns="91440" tIns="45720" rIns="91440" bIns="45720" rtlCol="0" anchor="b"/>
+          <a:lstStyle>
+            <a:lvl1pPr algn="l">
+              <a:defRPr sz="1200"/>
+            </a:lvl1pPr>
+          </a:lstStyle>
+          <a:p>
+            <a:endParaRPr lang="en-US"/>
+          </a:p>
+        </p:txBody>
+      </p:sp>
+      <p:sp>
+        <p:nvSpPr>
+          <p:cNvPr id="7" name="Slide Number Placeholder 6"/>
+          <p:cNvSpPr>
+            <a:spLocks noGrp="1"/>
+          </p:cNvSpPr>
+          <p:nvPr>
+            <p:ph type="sldNum" sz="quarter" idx="5"/>
+          </p:nvPr>
+        </p:nvSpPr>
+        <p:spPr>
+          <a:xfrm>
+            <a:off x="3884613" y="8685213"/>
+            <a:ext cx="2971800" cy="457200"/>
+          </a:xfrm>
+          <a:prstGeom prst="rect">
+            <a:avLst/>
+          </a:prstGeom>
+        </p:spPr>
+        <p:txBody>
+          <a:bodyPr vert="horz" lIns="91440" tIns="45720" rIns="91440" bIns="45720" rtlCol="0" anchor="b"/>
+          <a:lstStyle>
+            <a:lvl1pPr algn="r">
+              <a:defRPr sz="1200"/>
+            </a:lvl1pPr>
+          </a:lstStyle>
+          <a:p>
+            <a:fld id="{BB5E49A5-4136-284D-997B-48E1D791AD67}" type="slidenum">
+              <a:rPr lang="en-US" smtClean="0"/>
+              <a:t>‹#›</a:t>
+            </a:fld>
+            <a:endParaRPr lang="en-US"/>
+          </a:p>
+        </p:txBody>
+      </p:sp>
+    </p:spTree>
+    <p:extLst>
+      <p:ext uri="{BB962C8B-B14F-4D97-AF65-F5344CB8AC3E}">
+        <p14:creationId xmlns:p14="http://schemas.microsoft.com/office/powerpoint/2010/main" val="2623252185"/>
+      </p:ext>
+    </p:extLst>
+  </p:cSld>
+  <p:clrMap bg1="lt1" tx1="dk1" bg2="lt2" tx2="dk2" accent1="accent1" accent2="accent2" accent3="accent3" accent4="accent4" accent5="accent5" accent6="accent6" hlink="hlink" folHlink="folHlink"/>
+  <p:notesStyle>
+    <a:lvl1pPr marL="0" algn="l" defTabSz="457200" rtl="0" eaLnBrk="1" latinLnBrk="0" hangingPunct="1">
+      <a:defRPr sz="1200" kern="1200">
+        <a:solidFill>
+          <a:schemeClr val="tx1"/>
+        </a:solidFill>
+        <a:latin typeface="+mn-lt"/>
+        <a:ea typeface="+mn-ea"/>
+        <a:cs typeface="+mn-cs"/>
+      </a:defRPr>
+    </a:lvl1pPr>
+    <a:lvl2pPr marL="457200" algn="l" defTabSz="457200" rtl="0" eaLnBrk="1" latinLnBrk="0" hangingPunct="1">
+      <a:defRPr sz="1200" kern="1200">
+        <a:solidFill>
+          <a:schemeClr val="tx1"/>
+        </a:solidFill>
+        <a:latin typeface="+mn-lt"/>
+        <a:ea typeface="+mn-ea"/>
+        <a:cs typeface="+mn-cs"/>
+      </a:defRPr>
+    </a:lvl2pPr>
+    <a:lvl3pPr marL="914400" algn="l" defTabSz="457200" rtl="0" eaLnBrk="1" latinLnBrk="0" hangingPunct="1">
+      <a:defRPr sz="1200" kern="1200">
+        <a:solidFill>
+          <a:schemeClr val="tx1"/>
+        </a:solidFill>
+        <a:latin typeface="+mn-lt"/>
+        <a:ea typeface="+mn-ea"/>
+        <a:cs typeface="+mn-cs"/>
+      </a:defRPr>
+    </a:lvl3pPr>
+    <a:lvl4pPr marL="1371600" algn="l" defTabSz="457200" rtl="0" eaLnBrk="1" latinLnBrk="0" hangingPunct="1">
+      <a:defRPr sz="1200" kern="1200">
+        <a:solidFill>
+          <a:schemeClr val="tx1"/>
+        </a:solidFill>
+        <a:latin typeface="+mn-lt"/>
+        <a:ea typeface="+mn-ea"/>
+        <a:cs typeface="+mn-cs"/>
+      </a:defRPr>
+    </a:lvl4pPr>
+    <a:lvl5pPr marL="1828800" algn="l" defTabSz="457200" rtl="0" eaLnBrk="1" latinLnBrk="0" hangingPunct="1">
+      <a:defRPr sz="1200" kern="1200">
+        <a:solidFill>
+          <a:schemeClr val="tx1"/>
+        </a:solidFill>
+        <a:latin typeface="+mn-lt"/>
+        <a:ea typeface="+mn-ea"/>
+        <a:cs typeface="+mn-cs"/>
+      </a:defRPr>
+    </a:lvl5pPr>
+    <a:lvl6pPr marL="2286000" algn="l" defTabSz="457200" rtl="0" eaLnBrk="1" latinLnBrk="0" hangingPunct="1">
+      <a:defRPr sz="1200" kern="1200">
+        <a:solidFill>
+          <a:schemeClr val="tx1"/>
+        </a:solidFill>
+        <a:latin typeface="+mn-lt"/>
+        <a:ea typeface="+mn-ea"/>
+        <a:cs typeface="+mn-cs"/>
+      </a:defRPr>
+    </a:lvl6pPr>
+    <a:lvl7pPr marL="2743200" algn="l" defTabSz="457200" rtl="0" eaLnBrk="1" latinLnBrk="0" hangingPunct="1">
+      <a:defRPr sz="1200" kern="1200">
+        <a:solidFill>
+          <a:schemeClr val="tx1"/>
+        </a:solidFill>
+        <a:latin typeface="+mn-lt"/>
+        <a:ea typeface="+mn-ea"/>
+        <a:cs typeface="+mn-cs"/>
+      </a:defRPr>
+    </a:lvl7pPr>
+    <a:lvl8pPr marL="3200400" algn="l" defTabSz="457200" rtl="0" eaLnBrk="1" latinLnBrk="0" hangingPunct="1">
+      <a:defRPr sz="1200" kern="1200">
+        <a:solidFill>
+          <a:schemeClr val="tx1"/>
+        </a:solidFill>
+        <a:latin typeface="+mn-lt"/>
+        <a:ea typeface="+mn-ea"/>
+        <a:cs typeface="+mn-cs"/>
+      </a:defRPr>
+    </a:lvl8pPr>
+    <a:lvl9pPr marL="3657600" algn="l" defTabSz="457200" rtl="0" eaLnBrk="1" latinLnBrk="0" hangingPunct="1">
+      <a:defRPr sz="1200" kern="1200">
+        <a:solidFill>
+          <a:schemeClr val="tx1"/>
+        </a:solidFill>
+        <a:latin typeface="+mn-lt"/>
+        <a:ea typeface="+mn-ea"/>
+        <a:cs typeface="+mn-cs"/>
+      </a:defRPr>
+    </a:lvl9pPr>
+  </p:notesStyle>
+</p:notesMaster>
+</file>
+
+<file path=ppt/notesSlides/notesSlide1.xml><?xml version="1.0" encoding="utf-8"?>
+<p:notes xmlns:a="http://schemas.openxmlformats.org/drawingml/2006/main" xmlns:p="http://schemas.openxmlformats.org/presentationml/2006/main" xmlns:r="http://schemas.openxmlformats.org/officeDocument/2006/relationships">
+  <p:cSld>
+    <p:spTree>
+      <p:nvGrpSpPr>
+        <p:cNvPr id="1" name=""/>
+        <p:cNvGrpSpPr/>
+        <p:nvPr/>
+      </p:nvGrpSpPr>
+      <p:grpSpPr>
+        <a:xfrm>
+          <a:off x="0" y="0"/>
+          <a:ext cx="0" cy="0"/>
+          <a:chOff x="0" y="0"/>
+          <a:chExt cx="0" cy="0"/>
+        </a:xfrm>
+      </p:grpSpPr>
+      <p:sp>
+        <p:nvSpPr>
+          <p:cNvPr id="2" name="Slide Image Placeholder 1"/>
+          <p:cNvSpPr>
+            <a:spLocks noGrp="1"/>
+          </p:cNvSpPr>
+          <p:nvPr>
+            <p:ph type="sldImg" idx="2"/>
+          </p:nvPr>
+        </p:nvSpPr>
+        <p:spPr/>
+      </p:sp>
+      <p:sp>
+        <p:nvSpPr>
+          <p:cNvPr id="3" name="Notes Placeholder 2"/>
+          <p:cNvSpPr>
+            <a:spLocks noGrp="1"/>
+          </p:cNvSpPr>
+          <p:nvPr>
+            <p:ph type="body" idx="3" sz="quarter"/>
+          </p:nvPr>
+        </p:nvSpPr>
+        <p:spPr/>
+        <p:txBody>
+          <a:bodyPr/>
+          <a:lstStyle/>
+          <a:p>
+            <a:r>
+              <a:t>Week 2 delivered the full real-data pipeline on top of the dummy scaffold built in Week 1. Three major pieces of work were completed.</a:t>
+            </a:r>
+          </a:p>
+          <a:p/>
+          <a:p>
+            <a:r>
+              <a:t>First, World Bank WDI data: we hit the World Bank API directly to pull all seven macro indicators (GDP growth, inflation, fiscal balance, current account, remittances, unemployment, government debt) for all 22 countries across 2005–2023. The existing CSV already covered most ECA countries; we appended USA, Japan, and Mongolia which were missing.</a:t>
+            </a:r>
+          </a:p>
+          <a:p/>
+          <a:p>
+            <a:r>
+              <a:t>Second, IMF Article IV text acquisition: rather than downloading thousands of PDFs, we reverse-engineered the IMF website's Coveo search API. This let us query per country — roughly 30–100 hits each — instead of paginating through 7,335 total results. For each matched report, a Playwright browser clicks the IMF download button, intercepts the PDF bytes in memory, PyMuPDF extracts pages 1–6, and only the cleaned text is saved. No PDFs are stored on disk — this keeps the repo lightweight.</a:t>
+            </a:r>
+          </a:p>
+          <a:p/>
+          <a:p>
+            <a:r>
+              <a:t>Third, coverage: we achieved 240 real Article IV texts across 22 countries, a 57% fill rate. The gaps are genuine — Turkmenistan never publishes its reports publicly, Belarus and Ukraine have politically suspended consultations in recent years, and many Central Asian countries are on IMF programs where Article IV is folded into biennial program reviews rather than annual standalone reports. The pipeline's missingness mask handles these gaps explicitly, so missing text years simply default to the numerical-only pathway.</a:t>
+            </a:r>
+          </a:p>
+          <a:p/>
+          <a:p>
+            <a:r>
+              <a:t>Models are already implemented and were tested end-to-end on dummy data in Week 1. Week 3 begins BERT encoding of the real texts and launches the full experiment matrix.</a:t>
+            </a:r>
+          </a:p>
+        </p:txBody>
+      </p:sp>
+      <p:sp>
+        <p:nvSpPr>
+          <p:cNvPr id="4" name="Slide Number Placeholder 3"/>
+          <p:cNvSpPr>
+            <a:spLocks noGrp="1"/>
+          </p:cNvSpPr>
+          <p:nvPr>
+            <p:ph type="sldNum" idx="5" sz="quarter"/>
+          </p:nvPr>
+        </p:nvSpPr>
+        <p:spPr/>
+      </p:sp>
+    </p:spTree>
+  </p:cSld>
+  <p:clrMapOvr>
+    <a:masterClrMapping/>
+  </p:clrMapOvr>
+</p:notes>
+</file>
+
+<file path=ppt/notesSlides/notesSlide2.xml><?xml version="1.0" encoding="utf-8"?>
+<p:notes xmlns:a="http://schemas.openxmlformats.org/drawingml/2006/main" xmlns:p="http://schemas.openxmlformats.org/presentationml/2006/main" xmlns:r="http://schemas.openxmlformats.org/officeDocument/2006/relationships">
+  <p:cSld>
+    <p:spTree>
+      <p:nvGrpSpPr>
+        <p:cNvPr id="1" name=""/>
+        <p:cNvGrpSpPr/>
+        <p:nvPr/>
+      </p:nvGrpSpPr>
+      <p:grpSpPr>
+        <a:xfrm>
+          <a:off x="0" y="0"/>
+          <a:ext cx="0" cy="0"/>
+          <a:chOff x="0" y="0"/>
+          <a:chExt cx="0" cy="0"/>
+        </a:xfrm>
+      </p:grpSpPr>
+      <p:sp>
+        <p:nvSpPr>
+          <p:cNvPr id="2" name="Slide Image Placeholder 1"/>
+          <p:cNvSpPr>
+            <a:spLocks noGrp="1"/>
+          </p:cNvSpPr>
+          <p:nvPr>
+            <p:ph type="sldImg" idx="2"/>
+          </p:nvPr>
+        </p:nvSpPr>
+        <p:spPr/>
+      </p:sp>
+      <p:sp>
+        <p:nvSpPr>
+          <p:cNvPr id="3" name="Notes Placeholder 2"/>
+          <p:cNvSpPr>
+            <a:spLocks noGrp="1"/>
+          </p:cNvSpPr>
+          <p:nvPr>
+            <p:ph type="body" idx="3" sz="quarter"/>
+          </p:nvPr>
+        </p:nvSpPr>
+        <p:spPr/>
+        <p:txBody>
+          <a:bodyPr/>
+          <a:lstStyle/>
+          <a:p>
+            <a:r>
+              <a:t>This slide walks through the four-step IMM-TSF pipeline as applied to our macro forecasting problem. Each step maps directly to a module in the codebase.</a:t>
+            </a:r>
+          </a:p>
+          <a:p/>
+          <a:p>
+            <a:r>
+              <a:t>Step 1 — Pre-alignment: for each (country, query year) pair we extract a 10-year lookback window of WDI data, producing a (10 × 7) value matrix. Missing observations are flagged in a binary mask rather than imputed, and calendar years are normalised to [0, 1] so the model sees relative time, not raw years.</a:t>
+            </a:r>
+          </a:p>
+          <a:p/>
+          <a:p>
+            <a:r>
+              <a:t>Step 2 — Text encoding: each Article IV staff report summary is passed through frozen BERT-base-uncased to produce a 768-dimensional embedding. Embeddings are precomputed once and stored as .npy files so training never re-runs the language model. For country-years with no report, the embedding is a zero vector and the missingness mask signals its absence.</a:t>
+            </a:r>
+          </a:p>
+          <a:p/>
+          <a:p>
+            <a:r>
+              <a:t>Step 3 — RecAvg TTF: the Temporally-Tagged Fusion module applies a Gaussian kernel (σ = 1.0 year) to weight past embeddings by their distance from the query year. This naturally handles the 3–8 month IMF publication lag — a 2022 Article IV report published in mid-2023 contributes less weight to a 2023 forecast query than a report published on time would.</a:t>
+            </a:r>
+          </a:p>
+          <a:p/>
+          <a:p>
+            <a:r>
+              <a:t>Step 4 — GR-Add MMF: the Gated Residual Multimodal Fusion layer combines the GRU hidden state (numerical stream) with the projected text vector. A sigmoid gate decides how much of the text delta to add. If text is missing the gate collapses and the model falls back to a pure GRU prediction.</a:t>
+            </a:r>
+          </a:p>
+          <a:p/>
+          <a:p>
+            <a:r>
+              <a:t>Evaluation uses a strict chronological split: train on 2005–2019, validate on 2020–2021, test on 2022–2023. Primary metric is MSE on the held-out test years for GDP growth and inflation. Secondary analysis stratifies the MSE gain by text missingness severity to test whether gappier countries benefit more from the multimodal signal when text is available.</a:t>
+            </a:r>
+          </a:p>
+        </p:txBody>
+      </p:sp>
+      <p:sp>
+        <p:nvSpPr>
+          <p:cNvPr id="4" name="Slide Number Placeholder 3"/>
+          <p:cNvSpPr>
+            <a:spLocks noGrp="1"/>
+          </p:cNvSpPr>
+          <p:nvPr>
+            <p:ph type="sldNum" idx="5" sz="quarter"/>
+          </p:nvPr>
+        </p:nvSpPr>
+        <p:spPr/>
+      </p:sp>
+    </p:spTree>
+  </p:cSld>
+  <p:clrMapOvr>
+    <a:masterClrMapping/>
+  </p:clrMapOvr>
+</p:notes>
 </file>
 
 <file path=ppt/slideLayouts/slideLayout1.xml><?xml version="1.0" encoding="utf-8"?>
@@ -3172,7 +3716,7 @@
                   <a:srgbClr val="FFFFFF"/>
                 </a:solidFill>
               </a:rPr>
-              <a:t>Week 1 Progress: Data Pipeline Complete</a:t>
+              <a:t>Week 2 Progress: Real Data Pipeline Complete</a:t>
             </a:r>
           </a:p>
         </p:txBody>
@@ -3396,7 +3940,7 @@
                   <a:srgbClr val="333333"/>
                 </a:solidFill>
               </a:rPr>
-              <a:t>PyMuPDF extracts pages 1–6 (Executive Summary + Staff Appraisal) from real IMF Article IV reports. Filename parser recovers country code and reference year automatically.</a:t>
+              <a:t>PyMuPDF extracts pages 1–6 (Executive Summary + Staff Appraisal) directly from in-memory PDF bytes — no files written to disk. Coveo API used to locate reports per country; Playwright browser automates the IMF download button.</a:t>
             </a:r>
           </a:p>
         </p:txBody>
@@ -3474,7 +4018,7 @@
                   <a:srgbClr val="1B2A4A"/>
                 </a:solidFill>
               </a:rPr>
-              <a:t>Dummy Data Generation</a:t>
+              <a:t>Real Data Acquisition</a:t>
             </a:r>
           </a:p>
         </p:txBody>
@@ -3508,7 +4052,7 @@
                   <a:srgbClr val="333333"/>
                 </a:solidFill>
               </a:rPr>
-              <a:t>22 countries (Central Asia + ECA + developed anchors) × 19 years (2005–2023). 7 WDI-style indicators with realistic missing-data rates per country (0 % for USA/JPN → 35 %+ for TKM/TJK). 5-sentence Article IV summaries generated per country-year.</a:t>
+              <a:t>World Bank WDI API: 7 indicators × 22 countries × 2005–2023. IMF Article IV reports: Coveo search API → 240 real staff report texts extracted (57% coverage). PDFs streamed in memory — zero disk storage for raw PDFs.</a:t>
             </a:r>
           </a:p>
         </p:txBody>
@@ -4224,7 +4768,7 @@
                   <a:srgbClr val="FFFFFF"/>
                 </a:solidFill>
               </a:rPr>
-              <a:t>315+</a:t>
+              <a:t>240</a:t>
             </a:r>
           </a:p>
         </p:txBody>
@@ -4258,7 +4802,7 @@
                   <a:srgbClr val="FFFFFF"/>
                 </a:solidFill>
               </a:rPr>
-              <a:t>text summaries</a:t>
+              <a:t>real Article IV texts</a:t>
             </a:r>
           </a:p>
         </p:txBody>
@@ -4336,7 +4880,7 @@
                   <a:srgbClr val="FFFFFF"/>
                 </a:solidFill>
               </a:rPr>
-              <a:t>2</a:t>
+              <a:t>57%</a:t>
             </a:r>
           </a:p>
         </p:txBody>
@@ -4370,7 +4914,7 @@
                   <a:srgbClr val="FFFFFF"/>
                 </a:solidFill>
               </a:rPr>
-              <a:t>real IMF PDFs tested</a:t>
+              <a:t>text coverage (22 countries)</a:t>
             </a:r>
           </a:p>
         </p:txBody>
@@ -4550,7 +5094,7 @@
                   <a:srgbClr val="808080"/>
                 </a:solidFill>
               </a:rPr>
-              <a:t>Next: pull real World Bank WDI data  ·  download full Article IV corpus  ·  run BERT encoding  ·  full 100-epoch experiment matrix</a:t>
+              <a:t>Next: run BERT encoding on real Article IV texts  ·  full 100-epoch experiment matrix  ·  ablation analysis</a:t>
             </a:r>
           </a:p>
         </p:txBody>
@@ -6238,4 +6782,324 @@
   </a:objectDefaults>
   <a:extraClrSchemeLst/>
 </a:theme>
+</file>
+
+<file path=ppt/theme/theme2.xml><?xml version="1.0" encoding="utf-8"?>
+<a:theme xmlns:a="http://schemas.openxmlformats.org/drawingml/2006/main" name="Office Theme">
+  <a:themeElements>
+    <a:clrScheme name="Office">
+      <a:dk1>
+        <a:sysClr val="windowText" lastClr="000000"/>
+      </a:dk1>
+      <a:lt1>
+        <a:sysClr val="window" lastClr="FFFFFF"/>
+      </a:lt1>
+      <a:dk2>
+        <a:srgbClr val="1F497D"/>
+      </a:dk2>
+      <a:lt2>
+        <a:srgbClr val="EEECE1"/>
+      </a:lt2>
+      <a:accent1>
+        <a:srgbClr val="4F81BD"/>
+      </a:accent1>
+      <a:accent2>
+        <a:srgbClr val="C0504D"/>
+      </a:accent2>
+      <a:accent3>
+        <a:srgbClr val="9BBB59"/>
+      </a:accent3>
+      <a:accent4>
+        <a:srgbClr val="8064A2"/>
+      </a:accent4>
+      <a:accent5>
+        <a:srgbClr val="4BACC6"/>
+      </a:accent5>
+      <a:accent6>
+        <a:srgbClr val="F79646"/>
+      </a:accent6>
+      <a:hlink>
+        <a:srgbClr val="0000FF"/>
+      </a:hlink>
+      <a:folHlink>
+        <a:srgbClr val="800080"/>
+      </a:folHlink>
+    </a:clrScheme>
+    <a:fontScheme name="Office">
+      <a:majorFont>
+        <a:latin typeface="Calibri"/>
+        <a:ea typeface=""/>
+        <a:cs typeface=""/>
+        <a:font script="Jpan" typeface="ＭＳ Ｐゴシック"/>
+        <a:font script="Hang" typeface="맑은 고딕"/>
+        <a:font script="Hans" typeface="宋体"/>
+        <a:font script="Hant" typeface="新細明體"/>
+        <a:font script="Arab" typeface="Times New Roman"/>
+        <a:font script="Hebr" typeface="Times New Roman"/>
+        <a:font script="Thai" typeface="Angsana New"/>
+        <a:font script="Ethi" typeface="Nyala"/>
+        <a:font script="Beng" typeface="Vrinda"/>
+        <a:font script="Gujr" typeface="Shruti"/>
+        <a:font script="Khmr" typeface="MoolBoran"/>
+        <a:font script="Knda" typeface="Tunga"/>
+        <a:font script="Guru" typeface="Raavi"/>
+        <a:font script="Cans" typeface="Euphemia"/>
+        <a:font script="Cher" typeface="Plantagenet Cherokee"/>
+        <a:font script="Yiii" typeface="Microsoft Yi Baiti"/>
+        <a:font script="Tibt" typeface="Microsoft Himalaya"/>
+        <a:font script="Thaa" typeface="MV Boli"/>
+        <a:font script="Deva" typeface="Mangal"/>
+        <a:font script="Telu" typeface="Gautami"/>
+        <a:font script="Taml" typeface="Latha"/>
+        <a:font script="Syrc" typeface="Estrangelo Edessa"/>
+        <a:font script="Orya" typeface="Kalinga"/>
+        <a:font script="Mlym" typeface="Kartika"/>
+        <a:font script="Laoo" typeface="DokChampa"/>
+        <a:font script="Sinh" typeface="Iskoola Pota"/>
+        <a:font script="Mong" typeface="Mongolian Baiti"/>
+        <a:font script="Viet" typeface="Times New Roman"/>
+        <a:font script="Uigh" typeface="Microsoft Uighur"/>
+        <a:font script="Geor" typeface="Sylfaen"/>
+      </a:majorFont>
+      <a:minorFont>
+        <a:latin typeface="Calibri"/>
+        <a:ea typeface=""/>
+        <a:cs typeface=""/>
+        <a:font script="Jpan" typeface="ＭＳ Ｐゴシック"/>
+        <a:font script="Hang" typeface="맑은 고딕"/>
+        <a:font script="Hans" typeface="宋体"/>
+        <a:font script="Hant" typeface="新細明體"/>
+        <a:font script="Arab" typeface="Arial"/>
+        <a:font script="Hebr" typeface="Arial"/>
+        <a:font script="Thai" typeface="Cordia New"/>
+        <a:font script="Ethi" typeface="Nyala"/>
+        <a:font script="Beng" typeface="Vrinda"/>
+        <a:font script="Gujr" typeface="Shruti"/>
+        <a:font script="Khmr" typeface="DaunPenh"/>
+        <a:font script="Knda" typeface="Tunga"/>
+        <a:font script="Guru" typeface="Raavi"/>
+        <a:font script="Cans" typeface="Euphemia"/>
+        <a:font script="Cher" typeface="Plantagenet Cherokee"/>
+        <a:font script="Yiii" typeface="Microsoft Yi Baiti"/>
+        <a:font script="Tibt" typeface="Microsoft Himalaya"/>
+        <a:font script="Thaa" typeface="MV Boli"/>
+        <a:font script="Deva" typeface="Mangal"/>
+        <a:font script="Telu" typeface="Gautami"/>
+        <a:font script="Taml" typeface="Latha"/>
+        <a:font script="Syrc" typeface="Estrangelo Edessa"/>
+        <a:font script="Orya" typeface="Kalinga"/>
+        <a:font script="Mlym" typeface="Kartika"/>
+        <a:font script="Laoo" typeface="DokChampa"/>
+        <a:font script="Sinh" typeface="Iskoola Pota"/>
+        <a:font script="Mong" typeface="Mongolian Baiti"/>
+        <a:font script="Viet" typeface="Arial"/>
+        <a:font script="Uigh" typeface="Microsoft Uighur"/>
+        <a:font script="Geor" typeface="Sylfaen"/>
+      </a:minorFont>
+    </a:fontScheme>
+    <a:fmtScheme name="Office">
+      <a:fillStyleLst>
+        <a:solidFill>
+          <a:schemeClr val="phClr"/>
+        </a:solidFill>
+        <a:gradFill rotWithShape="1">
+          <a:gsLst>
+            <a:gs pos="0">
+              <a:schemeClr val="phClr">
+                <a:tint val="50000"/>
+                <a:satMod val="300000"/>
+              </a:schemeClr>
+            </a:gs>
+            <a:gs pos="35000">
+              <a:schemeClr val="phClr">
+                <a:tint val="37000"/>
+                <a:satMod val="300000"/>
+              </a:schemeClr>
+            </a:gs>
+            <a:gs pos="100000">
+              <a:schemeClr val="phClr">
+                <a:tint val="15000"/>
+                <a:satMod val="350000"/>
+              </a:schemeClr>
+            </a:gs>
+          </a:gsLst>
+          <a:lin ang="16200000" scaled="1"/>
+        </a:gradFill>
+        <a:gradFill rotWithShape="1">
+          <a:gsLst>
+            <a:gs pos="0">
+              <a:schemeClr val="phClr">
+                <a:tint val="100000"/>
+                <a:shade val="100000"/>
+                <a:satMod val="130000"/>
+              </a:schemeClr>
+            </a:gs>
+            <a:gs pos="100000">
+              <a:schemeClr val="phClr">
+                <a:tint val="50000"/>
+                <a:shade val="100000"/>
+                <a:satMod val="350000"/>
+              </a:schemeClr>
+            </a:gs>
+          </a:gsLst>
+          <a:lin ang="16200000" scaled="0"/>
+        </a:gradFill>
+      </a:fillStyleLst>
+      <a:lnStyleLst>
+        <a:ln w="9525" cap="flat" cmpd="sng" algn="ctr">
+          <a:solidFill>
+            <a:schemeClr val="phClr">
+              <a:shade val="95000"/>
+              <a:satMod val="105000"/>
+            </a:schemeClr>
+          </a:solidFill>
+          <a:prstDash val="solid"/>
+        </a:ln>
+        <a:ln w="25400" cap="flat" cmpd="sng" algn="ctr">
+          <a:solidFill>
+            <a:schemeClr val="phClr"/>
+          </a:solidFill>
+          <a:prstDash val="solid"/>
+        </a:ln>
+        <a:ln w="38100" cap="flat" cmpd="sng" algn="ctr">
+          <a:solidFill>
+            <a:schemeClr val="phClr"/>
+          </a:solidFill>
+          <a:prstDash val="solid"/>
+        </a:ln>
+      </a:lnStyleLst>
+      <a:effectStyleLst>
+        <a:effectStyle>
+          <a:effectLst>
+            <a:outerShdw blurRad="40000" dist="20000" dir="5400000" rotWithShape="0">
+              <a:srgbClr val="000000">
+                <a:alpha val="38000"/>
+              </a:srgbClr>
+            </a:outerShdw>
+          </a:effectLst>
+        </a:effectStyle>
+        <a:effectStyle>
+          <a:effectLst>
+            <a:outerShdw blurRad="40000" dist="23000" dir="5400000" rotWithShape="0">
+              <a:srgbClr val="000000">
+                <a:alpha val="35000"/>
+              </a:srgbClr>
+            </a:outerShdw>
+          </a:effectLst>
+        </a:effectStyle>
+        <a:effectStyle>
+          <a:effectLst>
+            <a:outerShdw blurRad="40000" dist="23000" dir="5400000" rotWithShape="0">
+              <a:srgbClr val="000000">
+                <a:alpha val="35000"/>
+              </a:srgbClr>
+            </a:outerShdw>
+          </a:effectLst>
+          <a:scene3d>
+            <a:camera prst="orthographicFront">
+              <a:rot lat="0" lon="0" rev="0"/>
+            </a:camera>
+            <a:lightRig rig="threePt" dir="t">
+              <a:rot lat="0" lon="0" rev="1200000"/>
+            </a:lightRig>
+          </a:scene3d>
+          <a:sp3d>
+            <a:bevelT w="63500" h="25400"/>
+          </a:sp3d>
+        </a:effectStyle>
+      </a:effectStyleLst>
+      <a:bgFillStyleLst>
+        <a:solidFill>
+          <a:schemeClr val="phClr"/>
+        </a:solidFill>
+        <a:gradFill rotWithShape="1">
+          <a:gsLst>
+            <a:gs pos="0">
+              <a:schemeClr val="phClr">
+                <a:tint val="40000"/>
+                <a:satMod val="350000"/>
+              </a:schemeClr>
+            </a:gs>
+            <a:gs pos="40000">
+              <a:schemeClr val="phClr">
+                <a:tint val="45000"/>
+                <a:shade val="99000"/>
+                <a:satMod val="350000"/>
+              </a:schemeClr>
+            </a:gs>
+            <a:gs pos="100000">
+              <a:schemeClr val="phClr">
+                <a:shade val="20000"/>
+                <a:satMod val="255000"/>
+              </a:schemeClr>
+            </a:gs>
+          </a:gsLst>
+          <a:path path="circle">
+            <a:fillToRect l="50000" t="-80000" r="50000" b="180000"/>
+          </a:path>
+        </a:gradFill>
+        <a:gradFill rotWithShape="1">
+          <a:gsLst>
+            <a:gs pos="0">
+              <a:schemeClr val="phClr">
+                <a:tint val="80000"/>
+                <a:satMod val="300000"/>
+              </a:schemeClr>
+            </a:gs>
+            <a:gs pos="100000">
+              <a:schemeClr val="phClr">
+                <a:shade val="30000"/>
+                <a:satMod val="200000"/>
+              </a:schemeClr>
+            </a:gs>
+          </a:gsLst>
+          <a:path path="circle">
+            <a:fillToRect l="50000" t="50000" r="50000" b="50000"/>
+          </a:path>
+        </a:gradFill>
+      </a:bgFillStyleLst>
+    </a:fmtScheme>
+  </a:themeElements>
+  <a:objectDefaults>
+    <a:spDef>
+      <a:spPr/>
+      <a:bodyPr/>
+      <a:lstStyle/>
+      <a:style>
+        <a:lnRef idx="1">
+          <a:schemeClr val="accent1"/>
+        </a:lnRef>
+        <a:fillRef idx="3">
+          <a:schemeClr val="accent1"/>
+        </a:fillRef>
+        <a:effectRef idx="2">
+          <a:schemeClr val="accent1"/>
+        </a:effectRef>
+        <a:fontRef idx="minor">
+          <a:schemeClr val="lt1"/>
+        </a:fontRef>
+      </a:style>
+    </a:spDef>
+    <a:lnDef>
+      <a:spPr/>
+      <a:bodyPr/>
+      <a:lstStyle/>
+      <a:style>
+        <a:lnRef idx="2">
+          <a:schemeClr val="accent1"/>
+        </a:lnRef>
+        <a:fillRef idx="0">
+          <a:schemeClr val="accent1"/>
+        </a:fillRef>
+        <a:effectRef idx="1">
+          <a:schemeClr val="accent1"/>
+        </a:effectRef>
+        <a:fontRef idx="minor">
+          <a:schemeClr val="tx1"/>
+        </a:fontRef>
+      </a:style>
+    </a:lnDef>
+  </a:objectDefaults>
+  <a:extraClrSchemeLst/>
+</a:theme>
 </file>
--- a/research/ppt/progress_week1.pptx
+++ b/research/ppt/progress_week1.pptx
@@ -4,9 +4,13 @@
   <p:sldMasterIdLst>
     <p:sldMasterId id="2147483648" r:id="rId1"/>
   </p:sldMasterIdLst>
+  <p:notesMasterIdLst>
+    <p:notesMasterId r:id="rId5"/>
+  </p:notesMasterIdLst>
   <p:sldIdLst>
-    <p:sldId id="256" r:id="rId2"/>
-    <p:sldId id="257" r:id="rId3"/>
+    <p:sldId id="258" r:id="rId2"/>
+    <p:sldId id="256" r:id="rId3"/>
+    <p:sldId id="257" r:id="rId4"/>
   </p:sldIdLst>
   <p:sldSz cx="12188825" cy="6858000"/>
   <p:notesSz cx="6858000" cy="9144000"/>
@@ -125,7 +129,7 @@
 </file>
 
 <file path=ppt/notesMasters/notesMaster1.xml><?xml version="1.0" encoding="utf-8"?>
-<p:notesMaster xmlns:a="http://schemas.openxmlformats.org/drawingml/2006/main" xmlns:p="http://schemas.openxmlformats.org/presentationml/2006/main" xmlns:r="http://schemas.openxmlformats.org/officeDocument/2006/relationships">
+<p:notesMaster xmlns:a="http://schemas.openxmlformats.org/drawingml/2006/main" xmlns:r="http://schemas.openxmlformats.org/officeDocument/2006/relationships" xmlns:p="http://schemas.openxmlformats.org/presentationml/2006/main">
   <p:cSld>
     <p:bg>
       <p:bgRef idx="1001">
@@ -159,7 +163,7 @@
         <p:spPr>
           <a:xfrm>
             <a:off x="0" y="0"/>
-            <a:ext cx="2971800" cy="457200"/>
+            <a:ext cx="2971800" cy="458788"/>
           </a:xfrm>
           <a:prstGeom prst="rect">
             <a:avLst/>
@@ -190,7 +194,7 @@
         <p:spPr>
           <a:xfrm>
             <a:off x="3884613" y="0"/>
-            <a:ext cx="2971800" cy="457200"/>
+            <a:ext cx="2971800" cy="458788"/>
           </a:xfrm>
           <a:prstGeom prst="rect">
             <a:avLst/>
@@ -204,9 +208,9 @@
             </a:lvl1pPr>
           </a:lstStyle>
           <a:p>
-            <a:fld id="{0F89C1C7-3DCD-1040-A9CF-14679D8B5DDD}" type="datetimeFigureOut">
+            <a:fld id="{1C79B8C6-9FD1-BB4D-8087-676618F9492F}" type="datetimeFigureOut">
               <a:rPr lang="en-US" smtClean="0"/>
-              <a:t>10/17/16</a:t>
+              <a:t>4/9/26</a:t>
             </a:fld>
             <a:endParaRPr lang="en-US"/>
           </a:p>
@@ -224,8 +228,8 @@
         </p:nvSpPr>
         <p:spPr>
           <a:xfrm>
-            <a:off x="1143000" y="685800"/>
-            <a:ext cx="4572000" cy="3429000"/>
+            <a:off x="685800" y="1143000"/>
+            <a:ext cx="5486400" cy="3086100"/>
           </a:xfrm>
           <a:prstGeom prst="rect">
             <a:avLst/>
@@ -257,8 +261,8 @@
         </p:nvSpPr>
         <p:spPr>
           <a:xfrm>
-            <a:off x="685800" y="4343400"/>
-            <a:ext cx="5486400" cy="4114800"/>
+            <a:off x="685800" y="4400550"/>
+            <a:ext cx="5486400" cy="3600450"/>
           </a:xfrm>
           <a:prstGeom prst="rect">
             <a:avLst/>
@@ -270,38 +274,37 @@
           <a:p>
             <a:pPr lvl="0"/>
             <a:r>
-              <a:rPr lang="en-US" smtClean="0"/>
+              <a:rPr lang="en-US"/>
               <a:t>Click to edit Master text styles</a:t>
             </a:r>
           </a:p>
           <a:p>
             <a:pPr lvl="1"/>
             <a:r>
-              <a:rPr lang="en-US" smtClean="0"/>
+              <a:rPr lang="en-US"/>
               <a:t>Second level</a:t>
             </a:r>
           </a:p>
           <a:p>
             <a:pPr lvl="2"/>
             <a:r>
-              <a:rPr lang="en-US" smtClean="0"/>
+              <a:rPr lang="en-US"/>
               <a:t>Third level</a:t>
             </a:r>
           </a:p>
           <a:p>
             <a:pPr lvl="3"/>
             <a:r>
-              <a:rPr lang="en-US" smtClean="0"/>
+              <a:rPr lang="en-US"/>
               <a:t>Fourth level</a:t>
             </a:r>
           </a:p>
           <a:p>
             <a:pPr lvl="4"/>
             <a:r>
-              <a:rPr lang="en-US" smtClean="0"/>
+              <a:rPr lang="en-US"/>
               <a:t>Fifth level</a:t>
             </a:r>
-            <a:endParaRPr lang="en-US"/>
           </a:p>
         </p:txBody>
       </p:sp>
@@ -318,7 +321,7 @@
         <p:spPr>
           <a:xfrm>
             <a:off x="0" y="8685213"/>
-            <a:ext cx="2971800" cy="457200"/>
+            <a:ext cx="2971800" cy="458787"/>
           </a:xfrm>
           <a:prstGeom prst="rect">
             <a:avLst/>
@@ -349,7 +352,7 @@
         <p:spPr>
           <a:xfrm>
             <a:off x="3884613" y="8685213"/>
-            <a:ext cx="2971800" cy="457200"/>
+            <a:ext cx="2971800" cy="458787"/>
           </a:xfrm>
           <a:prstGeom prst="rect">
             <a:avLst/>
@@ -363,7 +366,7 @@
             </a:lvl1pPr>
           </a:lstStyle>
           <a:p>
-            <a:fld id="{BB5E49A5-4136-284D-997B-48E1D791AD67}" type="slidenum">
+            <a:fld id="{59A11128-631A-2545-A6ED-C9A158F719A9}" type="slidenum">
               <a:rPr lang="en-US" smtClean="0"/>
               <a:t>‹#›</a:t>
             </a:fld>
@@ -374,13 +377,13 @@
     </p:spTree>
     <p:extLst>
       <p:ext uri="{BB962C8B-B14F-4D97-AF65-F5344CB8AC3E}">
-        <p14:creationId xmlns:p14="http://schemas.microsoft.com/office/powerpoint/2010/main" val="2623252185"/>
+        <p14:creationId xmlns:p14="http://schemas.microsoft.com/office/powerpoint/2010/main" val="3885975403"/>
       </p:ext>
     </p:extLst>
   </p:cSld>
   <p:clrMap bg1="lt1" tx1="dk1" bg2="lt2" tx2="dk2" accent1="accent1" accent2="accent2" accent3="accent3" accent4="accent4" accent5="accent5" accent6="accent6" hlink="hlink" folHlink="folHlink"/>
   <p:notesStyle>
-    <a:lvl1pPr marL="0" algn="l" defTabSz="457200" rtl="0" eaLnBrk="1" latinLnBrk="0" hangingPunct="1">
+    <a:lvl1pPr marL="0" algn="l" defTabSz="914400" rtl="0" eaLnBrk="1" latinLnBrk="0" hangingPunct="1">
       <a:defRPr sz="1200" kern="1200">
         <a:solidFill>
           <a:schemeClr val="tx1"/>
@@ -390,7 +393,7 @@
         <a:cs typeface="+mn-cs"/>
       </a:defRPr>
     </a:lvl1pPr>
-    <a:lvl2pPr marL="457200" algn="l" defTabSz="457200" rtl="0" eaLnBrk="1" latinLnBrk="0" hangingPunct="1">
+    <a:lvl2pPr marL="457200" algn="l" defTabSz="914400" rtl="0" eaLnBrk="1" latinLnBrk="0" hangingPunct="1">
       <a:defRPr sz="1200" kern="1200">
         <a:solidFill>
           <a:schemeClr val="tx1"/>
@@ -400,7 +403,7 @@
         <a:cs typeface="+mn-cs"/>
       </a:defRPr>
     </a:lvl2pPr>
-    <a:lvl3pPr marL="914400" algn="l" defTabSz="457200" rtl="0" eaLnBrk="1" latinLnBrk="0" hangingPunct="1">
+    <a:lvl3pPr marL="914400" algn="l" defTabSz="914400" rtl="0" eaLnBrk="1" latinLnBrk="0" hangingPunct="1">
       <a:defRPr sz="1200" kern="1200">
         <a:solidFill>
           <a:schemeClr val="tx1"/>
@@ -410,7 +413,7 @@
         <a:cs typeface="+mn-cs"/>
       </a:defRPr>
     </a:lvl3pPr>
-    <a:lvl4pPr marL="1371600" algn="l" defTabSz="457200" rtl="0" eaLnBrk="1" latinLnBrk="0" hangingPunct="1">
+    <a:lvl4pPr marL="1371600" algn="l" defTabSz="914400" rtl="0" eaLnBrk="1" latinLnBrk="0" hangingPunct="1">
       <a:defRPr sz="1200" kern="1200">
         <a:solidFill>
           <a:schemeClr val="tx1"/>
@@ -420,7 +423,7 @@
         <a:cs typeface="+mn-cs"/>
       </a:defRPr>
     </a:lvl4pPr>
-    <a:lvl5pPr marL="1828800" algn="l" defTabSz="457200" rtl="0" eaLnBrk="1" latinLnBrk="0" hangingPunct="1">
+    <a:lvl5pPr marL="1828800" algn="l" defTabSz="914400" rtl="0" eaLnBrk="1" latinLnBrk="0" hangingPunct="1">
       <a:defRPr sz="1200" kern="1200">
         <a:solidFill>
           <a:schemeClr val="tx1"/>
@@ -430,7 +433,7 @@
         <a:cs typeface="+mn-cs"/>
       </a:defRPr>
     </a:lvl5pPr>
-    <a:lvl6pPr marL="2286000" algn="l" defTabSz="457200" rtl="0" eaLnBrk="1" latinLnBrk="0" hangingPunct="1">
+    <a:lvl6pPr marL="2286000" algn="l" defTabSz="914400" rtl="0" eaLnBrk="1" latinLnBrk="0" hangingPunct="1">
       <a:defRPr sz="1200" kern="1200">
         <a:solidFill>
           <a:schemeClr val="tx1"/>
@@ -440,7 +443,7 @@
         <a:cs typeface="+mn-cs"/>
       </a:defRPr>
     </a:lvl6pPr>
-    <a:lvl7pPr marL="2743200" algn="l" defTabSz="457200" rtl="0" eaLnBrk="1" latinLnBrk="0" hangingPunct="1">
+    <a:lvl7pPr marL="2743200" algn="l" defTabSz="914400" rtl="0" eaLnBrk="1" latinLnBrk="0" hangingPunct="1">
       <a:defRPr sz="1200" kern="1200">
         <a:solidFill>
           <a:schemeClr val="tx1"/>
@@ -450,7 +453,7 @@
         <a:cs typeface="+mn-cs"/>
       </a:defRPr>
     </a:lvl7pPr>
-    <a:lvl8pPr marL="3200400" algn="l" defTabSz="457200" rtl="0" eaLnBrk="1" latinLnBrk="0" hangingPunct="1">
+    <a:lvl8pPr marL="3200400" algn="l" defTabSz="914400" rtl="0" eaLnBrk="1" latinLnBrk="0" hangingPunct="1">
       <a:defRPr sz="1200" kern="1200">
         <a:solidFill>
           <a:schemeClr val="tx1"/>
@@ -460,7 +463,7 @@
         <a:cs typeface="+mn-cs"/>
       </a:defRPr>
     </a:lvl8pPr>
-    <a:lvl9pPr marL="3657600" algn="l" defTabSz="457200" rtl="0" eaLnBrk="1" latinLnBrk="0" hangingPunct="1">
+    <a:lvl9pPr marL="3657600" algn="l" defTabSz="914400" rtl="0" eaLnBrk="1" latinLnBrk="0" hangingPunct="1">
       <a:defRPr sz="1200" kern="1200">
         <a:solidFill>
           <a:schemeClr val="tx1"/>
@@ -475,7 +478,7 @@
 </file>
 
 <file path=ppt/notesSlides/notesSlide1.xml><?xml version="1.0" encoding="utf-8"?>
-<p:notes xmlns:a="http://schemas.openxmlformats.org/drawingml/2006/main" xmlns:p="http://schemas.openxmlformats.org/presentationml/2006/main" xmlns:r="http://schemas.openxmlformats.org/officeDocument/2006/relationships">
+<p:notes xmlns:a="http://schemas.openxmlformats.org/drawingml/2006/main" xmlns:r="http://schemas.openxmlformats.org/officeDocument/2006/relationships" xmlns:p="http://schemas.openxmlformats.org/presentationml/2006/main">
   <p:cSld>
     <p:spTree>
       <p:nvGrpSpPr>
@@ -495,10 +498,10 @@
         <p:nvSpPr>
           <p:cNvPr id="2" name="Slide Image Placeholder 1"/>
           <p:cNvSpPr>
-            <a:spLocks noGrp="1"/>
+            <a:spLocks noGrp="1" noRot="1" noChangeAspect="1"/>
           </p:cNvSpPr>
           <p:nvPr>
-            <p:ph type="sldImg" idx="2"/>
+            <p:ph type="sldImg"/>
           </p:nvPr>
         </p:nvSpPr>
         <p:spPr/>
@@ -510,7 +513,7 @@
             <a:spLocks noGrp="1"/>
           </p:cNvSpPr>
           <p:nvPr>
-            <p:ph type="body" idx="3" sz="quarter"/>
+            <p:ph type="body" idx="1"/>
           </p:nvPr>
         </p:nvSpPr>
         <p:spPr/>
@@ -519,31 +522,90 @@
           <a:lstStyle/>
           <a:p>
             <a:r>
-              <a:t>Week 2 delivered the full real-data pipeline on top of the dummy scaffold built in Week 1. Three major pieces of work were completed.</a:t>
-            </a:r>
-          </a:p>
-          <a:p/>
-          <a:p>
-            <a:r>
-              <a:t>First, World Bank WDI data: we hit the World Bank API directly to pull all seven macro indicators (GDP growth, inflation, fiscal balance, current account, remittances, unemployment, government debt) for all 22 countries across 2005–2023. The existing CSV already covered most ECA countries; we appended USA, Japan, and Mongolia which were missing.</a:t>
-            </a:r>
-          </a:p>
-          <a:p/>
-          <a:p>
-            <a:r>
-              <a:t>Second, IMF Article IV text acquisition: rather than downloading thousands of PDFs, we reverse-engineered the IMF website's Coveo search API. This let us query per country — roughly 30–100 hits each — instead of paginating through 7,335 total results. For each matched report, a Playwright browser clicks the IMF download button, intercepts the PDF bytes in memory, PyMuPDF extracts pages 1–6, and only the cleaned text is saved. No PDFs are stored on disk — this keeps the repo lightweight.</a:t>
-            </a:r>
-          </a:p>
-          <a:p/>
-          <a:p>
-            <a:r>
-              <a:t>Third, coverage: we achieved 240 real Article IV texts across 22 countries, a 57% fill rate. The gaps are genuine — Turkmenistan never publishes its reports publicly, Belarus and Ukraine have politically suspended consultations in recent years, and many Central Asian countries are on IMF programs where Article IV is folded into biennial program reviews rather than annual standalone reports. The pipeline's missingness mask handles these gaps explicitly, so missing text years simply default to the numerical-only pathway.</a:t>
-            </a:r>
-          </a:p>
-          <a:p/>
-          <a:p>
-            <a:r>
-              <a:t>Models are already implemented and were tested end-to-end on dummy data in Week 1. Week 3 begins BERT encoding of the real texts and launches the full experiment matrix.</a:t>
+              <a:rPr lang="en-US" dirty="0"/>
+              <a:t>"This project asks a simple question: can reading the IMF's own economic assessments help predict GDP growth and inflation better than looking at numbers alone?</a:t>
+            </a:r>
+          </a:p>
+          <a:p>
+            <a:r>
+              <a:rPr lang="en-US" dirty="0"/>
+              <a:t>                                                                                                                                                                               </a:t>
+            </a:r>
+          </a:p>
+          <a:p>
+            <a:r>
+              <a:rPr lang="en-US" dirty="0"/>
+              <a:t>  We work with 22 countries across Central Asia and Eastern Europe — a region where data gaps are common and the IMF publishes regular Article IV consultation reports</a:t>
+            </a:r>
+          </a:p>
+          <a:p>
+            <a:r>
+              <a:rPr lang="en-US" dirty="0"/>
+              <a:t>  reviewing each country's economic outlook.                                                                                                                                   </a:t>
+            </a:r>
+          </a:p>
+          <a:p>
+            <a:r>
+              <a:rPr lang="en-US" dirty="0"/>
+              <a:t>                                                            </a:t>
+            </a:r>
+          </a:p>
+          <a:p>
+            <a:r>
+              <a:rPr lang="en-US" dirty="0"/>
+              <a:t>  Two data streams feed the model: World Bank WDI macro indicators (7 variables, 2005–2023) and IMF Article IV staff report texts (240 real reports, 57% coverage). Missing    </a:t>
+            </a:r>
+          </a:p>
+          <a:p>
+            <a:r>
+              <a:rPr lang="en-US" dirty="0"/>
+              <a:t>  data is handled explicitly with a missingness mask — no imputation.</a:t>
+            </a:r>
+          </a:p>
+          <a:p>
+            <a:r>
+              <a:rPr lang="en-US" dirty="0"/>
+              <a:t>                                                                                                                                                                               </a:t>
+            </a:r>
+          </a:p>
+          <a:p>
+            <a:r>
+              <a:rPr lang="en-US" dirty="0"/>
+              <a:t>  Three models are compared: </a:t>
+            </a:r>
+            <a:r>
+              <a:rPr lang="en-US" dirty="0" err="1"/>
+              <a:t>DLinear</a:t>
+            </a:r>
+            <a:r>
+              <a:rPr lang="en-US" dirty="0"/>
+              <a:t> as a simple numerical baseline, </a:t>
+            </a:r>
+            <a:r>
+              <a:rPr lang="en-US" dirty="0" err="1"/>
+              <a:t>NumericalGRU</a:t>
+            </a:r>
+            <a:r>
+              <a:rPr lang="en-US" dirty="0"/>
+              <a:t> to add temporal dynamics, and GR-Add MMF as the full multimodal model that fuses text with   </a:t>
+            </a:r>
+          </a:p>
+          <a:p>
+            <a:r>
+              <a:rPr lang="en-US" dirty="0"/>
+              <a:t>  time series via gated residual addition.</a:t>
+            </a:r>
+          </a:p>
+          <a:p>
+            <a:r>
+              <a:rPr lang="en-US" dirty="0"/>
+              <a:t>                                                                                                                                                                               </a:t>
+            </a:r>
+          </a:p>
+          <a:p>
+            <a:r>
+              <a:rPr lang="en-US" dirty="0"/>
+              <a:t>  Results are evaluated on the 2022–2023 holdout years using MSE for GDP growth and inflation."</a:t>
             </a:r>
           </a:p>
         </p:txBody>
@@ -555,12 +617,28 @@
             <a:spLocks noGrp="1"/>
           </p:cNvSpPr>
           <p:nvPr>
-            <p:ph type="sldNum" idx="5" sz="quarter"/>
+            <p:ph type="sldNum" sz="quarter" idx="5"/>
           </p:nvPr>
         </p:nvSpPr>
         <p:spPr/>
+        <p:txBody>
+          <a:bodyPr/>
+          <a:lstStyle/>
+          <a:p>
+            <a:fld id="{59A11128-631A-2545-A6ED-C9A158F719A9}" type="slidenum">
+              <a:rPr lang="en-US" smtClean="0"/>
+              <a:t>1</a:t>
+            </a:fld>
+            <a:endParaRPr lang="en-US"/>
+          </a:p>
+        </p:txBody>
       </p:sp>
     </p:spTree>
+    <p:extLst>
+      <p:ext uri="{BB962C8B-B14F-4D97-AF65-F5344CB8AC3E}">
+        <p14:creationId xmlns:p14="http://schemas.microsoft.com/office/powerpoint/2010/main" val="1460765993"/>
+      </p:ext>
+    </p:extLst>
   </p:cSld>
   <p:clrMapOvr>
     <a:masterClrMapping/>
@@ -569,7 +647,7 @@
 </file>
 
 <file path=ppt/notesSlides/notesSlide2.xml><?xml version="1.0" encoding="utf-8"?>
-<p:notes xmlns:a="http://schemas.openxmlformats.org/drawingml/2006/main" xmlns:p="http://schemas.openxmlformats.org/presentationml/2006/main" xmlns:r="http://schemas.openxmlformats.org/officeDocument/2006/relationships">
+<p:notes xmlns:a="http://schemas.openxmlformats.org/drawingml/2006/main" xmlns:r="http://schemas.openxmlformats.org/officeDocument/2006/relationships" xmlns:p="http://schemas.openxmlformats.org/presentationml/2006/main">
   <p:cSld>
     <p:spTree>
       <p:nvGrpSpPr>
@@ -589,7 +667,7 @@
         <p:nvSpPr>
           <p:cNvPr id="2" name="Slide Image Placeholder 1"/>
           <p:cNvSpPr>
-            <a:spLocks noGrp="1"/>
+            <a:spLocks noGrp="1" noRot="1" noChangeAspect="1"/>
           </p:cNvSpPr>
           <p:nvPr>
             <p:ph type="sldImg" idx="2"/>
@@ -604,7 +682,7 @@
             <a:spLocks noGrp="1"/>
           </p:cNvSpPr>
           <p:nvPr>
-            <p:ph type="body" idx="3" sz="quarter"/>
+            <p:ph type="body" sz="quarter" idx="3"/>
           </p:nvPr>
         </p:nvSpPr>
         <p:spPr/>
@@ -613,37 +691,39 @@
           <a:lstStyle/>
           <a:p>
             <a:r>
-              <a:t>This slide walks through the four-step IMM-TSF pipeline as applied to our macro forecasting problem. Each step maps directly to a module in the codebase.</a:t>
-            </a:r>
-          </a:p>
-          <a:p/>
-          <a:p>
-            <a:r>
-              <a:t>Step 1 — Pre-alignment: for each (country, query year) pair we extract a 10-year lookback window of WDI data, producing a (10 × 7) value matrix. Missing observations are flagged in a binary mask rather than imputed, and calendar years are normalised to [0, 1] so the model sees relative time, not raw years.</a:t>
-            </a:r>
-          </a:p>
-          <a:p/>
-          <a:p>
-            <a:r>
-              <a:t>Step 2 — Text encoding: each Article IV staff report summary is passed through frozen BERT-base-uncased to produce a 768-dimensional embedding. Embeddings are precomputed once and stored as .npy files so training never re-runs the language model. For country-years with no report, the embedding is a zero vector and the missingness mask signals its absence.</a:t>
-            </a:r>
-          </a:p>
-          <a:p/>
-          <a:p>
-            <a:r>
-              <a:t>Step 3 — RecAvg TTF: the Temporally-Tagged Fusion module applies a Gaussian kernel (σ = 1.0 year) to weight past embeddings by their distance from the query year. This naturally handles the 3–8 month IMF publication lag — a 2022 Article IV report published in mid-2023 contributes less weight to a 2023 forecast query than a report published on time would.</a:t>
-            </a:r>
-          </a:p>
-          <a:p/>
-          <a:p>
-            <a:r>
-              <a:t>Step 4 — GR-Add MMF: the Gated Residual Multimodal Fusion layer combines the GRU hidden state (numerical stream) with the projected text vector. A sigmoid gate decides how much of the text delta to add. If text is missing the gate collapses and the model falls back to a pure GRU prediction.</a:t>
-            </a:r>
-          </a:p>
-          <a:p/>
-          <a:p>
-            <a:r>
-              <a:t>Evaluation uses a strict chronological split: train on 2005–2019, validate on 2020–2021, test on 2022–2023. Primary metric is MSE on the held-out test years for GDP growth and inflation. Secondary analysis stratifies the MSE gain by text missingness severity to test whether gappier countries benefit more from the multimodal signal when text is available.</a:t>
+              <a:t>Week 2 delivered the full real-data pipeline on top of the dummy scaffold built in Week 1. Three major pieces of work were completed.</a:t>
+            </a:r>
+          </a:p>
+          <a:p>
+            <a:endParaRPr/>
+          </a:p>
+          <a:p>
+            <a:r>
+              <a:t>First, World Bank WDI data: we hit the World Bank API directly to pull all seven macro indicators (GDP growth, inflation, fiscal balance, current account, remittances, unemployment, government debt) for all 22 countries across 2005–2023. The existing CSV already covered most ECA countries; we appended USA, Japan, and Mongolia which were missing.</a:t>
+            </a:r>
+          </a:p>
+          <a:p>
+            <a:endParaRPr/>
+          </a:p>
+          <a:p>
+            <a:r>
+              <a:t>Second, IMF Article IV text acquisition: rather than downloading thousands of PDFs, we reverse-engineered the IMF website's Coveo search API. This let us query per country — roughly 30–100 hits each — instead of paginating through 7,335 total results. For each matched report, a Playwright browser clicks the IMF download button, intercepts the PDF bytes in memory, PyMuPDF extracts pages 1–6, and only the cleaned text is saved. No PDFs are stored on disk — this keeps the repo lightweight.</a:t>
+            </a:r>
+          </a:p>
+          <a:p>
+            <a:endParaRPr/>
+          </a:p>
+          <a:p>
+            <a:r>
+              <a:t>Third, coverage: we achieved 240 real Article IV texts across 22 countries, a 57% fill rate. The gaps are genuine — Turkmenistan never publishes its reports publicly, Belarus and Ukraine have politically suspended consultations in recent years, and many Central Asian countries are on IMF programs where Article IV is folded into biennial program reviews rather than annual standalone reports. The pipeline's missingness mask handles these gaps explicitly, so missing text years simply default to the numerical-only pathway.</a:t>
+            </a:r>
+          </a:p>
+          <a:p>
+            <a:endParaRPr/>
+          </a:p>
+          <a:p>
+            <a:r>
+              <a:t>Models are already implemented and were tested end-to-end on dummy data in Week 1. Week 3 begins BERT encoding of the real texts and launches the full experiment matrix.</a:t>
             </a:r>
           </a:p>
         </p:txBody>
@@ -655,7 +735,117 @@
             <a:spLocks noGrp="1"/>
           </p:cNvSpPr>
           <p:nvPr>
-            <p:ph type="sldNum" idx="5" sz="quarter"/>
+            <p:ph type="sldNum" sz="quarter" idx="5"/>
+          </p:nvPr>
+        </p:nvSpPr>
+        <p:spPr/>
+      </p:sp>
+    </p:spTree>
+  </p:cSld>
+  <p:clrMapOvr>
+    <a:masterClrMapping/>
+  </p:clrMapOvr>
+</p:notes>
+</file>
+
+<file path=ppt/notesSlides/notesSlide3.xml><?xml version="1.0" encoding="utf-8"?>
+<p:notes xmlns:a="http://schemas.openxmlformats.org/drawingml/2006/main" xmlns:r="http://schemas.openxmlformats.org/officeDocument/2006/relationships" xmlns:p="http://schemas.openxmlformats.org/presentationml/2006/main">
+  <p:cSld>
+    <p:spTree>
+      <p:nvGrpSpPr>
+        <p:cNvPr id="1" name=""/>
+        <p:cNvGrpSpPr/>
+        <p:nvPr/>
+      </p:nvGrpSpPr>
+      <p:grpSpPr>
+        <a:xfrm>
+          <a:off x="0" y="0"/>
+          <a:ext cx="0" cy="0"/>
+          <a:chOff x="0" y="0"/>
+          <a:chExt cx="0" cy="0"/>
+        </a:xfrm>
+      </p:grpSpPr>
+      <p:sp>
+        <p:nvSpPr>
+          <p:cNvPr id="2" name="Slide Image Placeholder 1"/>
+          <p:cNvSpPr>
+            <a:spLocks noGrp="1" noRot="1" noChangeAspect="1"/>
+          </p:cNvSpPr>
+          <p:nvPr>
+            <p:ph type="sldImg" idx="2"/>
+          </p:nvPr>
+        </p:nvSpPr>
+        <p:spPr/>
+      </p:sp>
+      <p:sp>
+        <p:nvSpPr>
+          <p:cNvPr id="3" name="Notes Placeholder 2"/>
+          <p:cNvSpPr>
+            <a:spLocks noGrp="1"/>
+          </p:cNvSpPr>
+          <p:nvPr>
+            <p:ph type="body" sz="quarter" idx="3"/>
+          </p:nvPr>
+        </p:nvSpPr>
+        <p:spPr/>
+        <p:txBody>
+          <a:bodyPr/>
+          <a:lstStyle/>
+          <a:p>
+            <a:r>
+              <a:t>This slide walks through the four-step IMM-TSF pipeline as applied to our macro forecasting problem. Each step maps directly to a module in the codebase.</a:t>
+            </a:r>
+          </a:p>
+          <a:p>
+            <a:endParaRPr/>
+          </a:p>
+          <a:p>
+            <a:r>
+              <a:t>Step 1 — Pre-alignment: for each (country, query year) pair we extract a 10-year lookback window of WDI data, producing a (10 × 7) value matrix. Missing observations are flagged in a binary mask rather than imputed, and calendar years are normalised to [0, 1] so the model sees relative time, not raw years.</a:t>
+            </a:r>
+          </a:p>
+          <a:p>
+            <a:endParaRPr/>
+          </a:p>
+          <a:p>
+            <a:r>
+              <a:t>Step 2 — Text encoding: each Article IV staff report summary is passed through frozen BERT-base-uncased to produce a 768-dimensional embedding. Embeddings are precomputed once and stored as .npy files so training never re-runs the language model. For country-years with no report, the embedding is a zero vector and the missingness mask signals its absence.</a:t>
+            </a:r>
+          </a:p>
+          <a:p>
+            <a:endParaRPr/>
+          </a:p>
+          <a:p>
+            <a:r>
+              <a:t>Step 3 — RecAvg TTF: the Temporally-Tagged Fusion module applies a Gaussian kernel (σ = 1.0 year) to weight past embeddings by their distance from the query year. This naturally handles the 3–8 month IMF publication lag — a 2022 Article IV report published in mid-2023 contributes less weight to a 2023 forecast query than a report published on time would.</a:t>
+            </a:r>
+          </a:p>
+          <a:p>
+            <a:endParaRPr/>
+          </a:p>
+          <a:p>
+            <a:r>
+              <a:t>Step 4 — GR-Add MMF: the Gated Residual Multimodal Fusion layer combines the GRU hidden state (numerical stream) with the projected text vector. A sigmoid gate decides how much of the text delta to add. If text is missing the gate collapses and the model falls back to a pure GRU prediction.</a:t>
+            </a:r>
+          </a:p>
+          <a:p>
+            <a:endParaRPr/>
+          </a:p>
+          <a:p>
+            <a:r>
+              <a:t>Evaluation uses a strict chronological split: train on 2005–2019, validate on 2020–2021, test on 2022–2023. Primary metric is MSE on the held-out test years for GDP growth and inflation. Secondary analysis stratifies the MSE gain by text missingness severity to test whether gappier countries benefit more from the multimodal signal when text is available.</a:t>
+            </a:r>
+          </a:p>
+        </p:txBody>
+      </p:sp>
+      <p:sp>
+        <p:nvSpPr>
+          <p:cNvPr id="4" name="Slide Number Placeholder 3"/>
+          <p:cNvSpPr>
+            <a:spLocks noGrp="1"/>
+          </p:cNvSpPr>
+          <p:nvPr>
+            <p:ph type="sldNum" sz="quarter" idx="5"/>
           </p:nvPr>
         </p:nvSpPr>
         <p:spPr/>
@@ -847,7 +1037,7 @@
           <a:p>
             <a:fld id="{5BCAD085-E8A6-8845-BD4E-CB4CCA059FC4}" type="datetimeFigureOut">
               <a:rPr lang="en-US" smtClean="0"/>
-              <a:t>4/7/26</a:t>
+              <a:t>4/9/26</a:t>
             </a:fld>
             <a:endParaRPr lang="en-US"/>
           </a:p>
@@ -1015,7 +1205,7 @@
           <a:p>
             <a:fld id="{5BCAD085-E8A6-8845-BD4E-CB4CCA059FC4}" type="datetimeFigureOut">
               <a:rPr lang="en-US" smtClean="0"/>
-              <a:t>4/7/26</a:t>
+              <a:t>4/9/26</a:t>
             </a:fld>
             <a:endParaRPr lang="en-US"/>
           </a:p>
@@ -1193,7 +1383,7 @@
           <a:p>
             <a:fld id="{5BCAD085-E8A6-8845-BD4E-CB4CCA059FC4}" type="datetimeFigureOut">
               <a:rPr lang="en-US" smtClean="0"/>
-              <a:t>4/7/26</a:t>
+              <a:t>4/9/26</a:t>
             </a:fld>
             <a:endParaRPr lang="en-US"/>
           </a:p>
@@ -1361,7 +1551,7 @@
           <a:p>
             <a:fld id="{5BCAD085-E8A6-8845-BD4E-CB4CCA059FC4}" type="datetimeFigureOut">
               <a:rPr lang="en-US" smtClean="0"/>
-              <a:t>4/7/26</a:t>
+              <a:t>4/9/26</a:t>
             </a:fld>
             <a:endParaRPr lang="en-US"/>
           </a:p>
@@ -1606,7 +1796,7 @@
           <a:p>
             <a:fld id="{5BCAD085-E8A6-8845-BD4E-CB4CCA059FC4}" type="datetimeFigureOut">
               <a:rPr lang="en-US" smtClean="0"/>
-              <a:t>4/7/26</a:t>
+              <a:t>4/9/26</a:t>
             </a:fld>
             <a:endParaRPr lang="en-US"/>
           </a:p>
@@ -1891,7 +2081,7 @@
           <a:p>
             <a:fld id="{5BCAD085-E8A6-8845-BD4E-CB4CCA059FC4}" type="datetimeFigureOut">
               <a:rPr lang="en-US" smtClean="0"/>
-              <a:t>4/7/26</a:t>
+              <a:t>4/9/26</a:t>
             </a:fld>
             <a:endParaRPr lang="en-US"/>
           </a:p>
@@ -2310,7 +2500,7 @@
           <a:p>
             <a:fld id="{5BCAD085-E8A6-8845-BD4E-CB4CCA059FC4}" type="datetimeFigureOut">
               <a:rPr lang="en-US" smtClean="0"/>
-              <a:t>4/7/26</a:t>
+              <a:t>4/9/26</a:t>
             </a:fld>
             <a:endParaRPr lang="en-US"/>
           </a:p>
@@ -2427,7 +2617,7 @@
           <a:p>
             <a:fld id="{5BCAD085-E8A6-8845-BD4E-CB4CCA059FC4}" type="datetimeFigureOut">
               <a:rPr lang="en-US" smtClean="0"/>
-              <a:t>4/7/26</a:t>
+              <a:t>4/9/26</a:t>
             </a:fld>
             <a:endParaRPr lang="en-US"/>
           </a:p>
@@ -2522,7 +2712,7 @@
           <a:p>
             <a:fld id="{5BCAD085-E8A6-8845-BD4E-CB4CCA059FC4}" type="datetimeFigureOut">
               <a:rPr lang="en-US" smtClean="0"/>
-              <a:t>4/7/26</a:t>
+              <a:t>4/9/26</a:t>
             </a:fld>
             <a:endParaRPr lang="en-US"/>
           </a:p>
@@ -2797,7 +2987,7 @@
           <a:p>
             <a:fld id="{5BCAD085-E8A6-8845-BD4E-CB4CCA059FC4}" type="datetimeFigureOut">
               <a:rPr lang="en-US" smtClean="0"/>
-              <a:t>4/7/26</a:t>
+              <a:t>4/9/26</a:t>
             </a:fld>
             <a:endParaRPr lang="en-US"/>
           </a:p>
@@ -3049,7 +3239,7 @@
           <a:p>
             <a:fld id="{5BCAD085-E8A6-8845-BD4E-CB4CCA059FC4}" type="datetimeFigureOut">
               <a:rPr lang="en-US" smtClean="0"/>
-              <a:t>4/7/26</a:t>
+              <a:t>4/9/26</a:t>
             </a:fld>
             <a:endParaRPr lang="en-US"/>
           </a:p>
@@ -3260,7 +3450,7 @@
           <a:p>
             <a:fld id="{5BCAD085-E8A6-8845-BD4E-CB4CCA059FC4}" type="datetimeFigureOut">
               <a:rPr lang="en-US" smtClean="0"/>
-              <a:t>4/7/26</a:t>
+              <a:t>4/9/26</a:t>
             </a:fld>
             <a:endParaRPr lang="en-US"/>
           </a:p>
@@ -3621,6 +3811,925 @@
 <file path=ppt/slides/slide1.xml><?xml version="1.0" encoding="utf-8"?>
 <p:sld xmlns:a="http://schemas.openxmlformats.org/drawingml/2006/main" xmlns:r="http://schemas.openxmlformats.org/officeDocument/2006/relationships" xmlns:p="http://schemas.openxmlformats.org/presentationml/2006/main">
   <p:cSld>
+    <p:spTree>
+      <p:nvGrpSpPr>
+        <p:cNvPr id="1" name=""/>
+        <p:cNvGrpSpPr/>
+        <p:nvPr/>
+      </p:nvGrpSpPr>
+      <p:grpSpPr>
+        <a:xfrm>
+          <a:off x="0" y="0"/>
+          <a:ext cx="0" cy="0"/>
+          <a:chOff x="0" y="0"/>
+          <a:chExt cx="0" cy="0"/>
+        </a:xfrm>
+      </p:grpSpPr>
+      <p:sp>
+        <p:nvSpPr>
+          <p:cNvPr id="2" name="Rectangle 1"/>
+          <p:cNvSpPr/>
+          <p:nvPr/>
+        </p:nvSpPr>
+        <p:spPr>
+          <a:xfrm>
+            <a:off x="0" y="0"/>
+            <a:ext cx="12188952" cy="6858000"/>
+          </a:xfrm>
+          <a:prstGeom prst="rect">
+            <a:avLst/>
+          </a:prstGeom>
+          <a:solidFill>
+            <a:srgbClr val="1A1A2E"/>
+          </a:solidFill>
+          <a:ln>
+            <a:noFill/>
+          </a:ln>
+        </p:spPr>
+        <p:style>
+          <a:lnRef idx="1">
+            <a:schemeClr val="accent1"/>
+          </a:lnRef>
+          <a:fillRef idx="3">
+            <a:schemeClr val="accent1"/>
+          </a:fillRef>
+          <a:effectRef idx="2">
+            <a:schemeClr val="accent1"/>
+          </a:effectRef>
+          <a:fontRef idx="minor">
+            <a:schemeClr val="lt1"/>
+          </a:fontRef>
+        </p:style>
+        <p:txBody>
+          <a:bodyPr rtlCol="0" anchor="ctr"/>
+          <a:lstStyle/>
+          <a:p>
+            <a:pPr algn="ctr"/>
+            <a:endParaRPr/>
+          </a:p>
+        </p:txBody>
+      </p:sp>
+      <p:sp>
+        <p:nvSpPr>
+          <p:cNvPr id="3" name="Rectangle 2"/>
+          <p:cNvSpPr/>
+          <p:nvPr/>
+        </p:nvSpPr>
+        <p:spPr>
+          <a:xfrm>
+            <a:off x="0" y="0"/>
+            <a:ext cx="12188952" cy="1143000"/>
+          </a:xfrm>
+          <a:prstGeom prst="rect">
+            <a:avLst/>
+          </a:prstGeom>
+          <a:solidFill>
+            <a:srgbClr val="16213E"/>
+          </a:solidFill>
+          <a:ln>
+            <a:noFill/>
+          </a:ln>
+        </p:spPr>
+        <p:style>
+          <a:lnRef idx="1">
+            <a:schemeClr val="accent1"/>
+          </a:lnRef>
+          <a:fillRef idx="3">
+            <a:schemeClr val="accent1"/>
+          </a:fillRef>
+          <a:effectRef idx="2">
+            <a:schemeClr val="accent1"/>
+          </a:effectRef>
+          <a:fontRef idx="minor">
+            <a:schemeClr val="lt1"/>
+          </a:fontRef>
+        </p:style>
+        <p:txBody>
+          <a:bodyPr rtlCol="0" anchor="ctr"/>
+          <a:lstStyle/>
+          <a:p>
+            <a:pPr algn="ctr"/>
+            <a:endParaRPr/>
+          </a:p>
+        </p:txBody>
+      </p:sp>
+      <p:sp>
+        <p:nvSpPr>
+          <p:cNvPr id="4" name="TextBox 3"/>
+          <p:cNvSpPr txBox="1"/>
+          <p:nvPr/>
+        </p:nvSpPr>
+        <p:spPr>
+          <a:xfrm>
+            <a:off x="365760" y="109728"/>
+            <a:ext cx="9144000" cy="548640"/>
+          </a:xfrm>
+          <a:prstGeom prst="rect">
+            <a:avLst/>
+          </a:prstGeom>
+          <a:noFill/>
+        </p:spPr>
+        <p:txBody>
+          <a:bodyPr wrap="square">
+            <a:spAutoFit/>
+          </a:bodyPr>
+          <a:lstStyle/>
+          <a:p>
+            <a:pPr algn="l"/>
+            <a:r>
+              <a:rPr sz="2800" b="1" i="0">
+                <a:solidFill>
+                  <a:srgbClr val="FFFFFF"/>
+                </a:solidFill>
+              </a:rPr>
+              <a:t>Project Recap</a:t>
+            </a:r>
+          </a:p>
+        </p:txBody>
+      </p:sp>
+      <p:sp>
+        <p:nvSpPr>
+          <p:cNvPr id="5" name="TextBox 4"/>
+          <p:cNvSpPr txBox="1"/>
+          <p:nvPr/>
+        </p:nvSpPr>
+        <p:spPr>
+          <a:xfrm>
+            <a:off x="365760" y="658368"/>
+            <a:ext cx="10972800" cy="365760"/>
+          </a:xfrm>
+          <a:prstGeom prst="rect">
+            <a:avLst/>
+          </a:prstGeom>
+          <a:noFill/>
+        </p:spPr>
+        <p:txBody>
+          <a:bodyPr wrap="square">
+            <a:spAutoFit/>
+          </a:bodyPr>
+          <a:lstStyle/>
+          <a:p>
+            <a:pPr algn="l"/>
+            <a:r>
+              <a:rPr sz="1000" b="0" i="0">
+                <a:solidFill>
+                  <a:srgbClr val="AABBCC"/>
+                </a:solidFill>
+              </a:rPr>
+              <a:t>Macro Forecasting with IMF Text  ·  STAT 8240  ·  Kennesaw State University  ·  April 2025</a:t>
+            </a:r>
+          </a:p>
+        </p:txBody>
+      </p:sp>
+      <p:sp>
+        <p:nvSpPr>
+          <p:cNvPr id="6" name="Rectangle 5"/>
+          <p:cNvSpPr/>
+          <p:nvPr/>
+        </p:nvSpPr>
+        <p:spPr>
+          <a:xfrm>
+            <a:off x="365760" y="1325880"/>
+            <a:ext cx="11457432" cy="594360"/>
+          </a:xfrm>
+          <a:prstGeom prst="rect">
+            <a:avLst/>
+          </a:prstGeom>
+          <a:solidFill>
+            <a:srgbClr val="2D4A7A"/>
+          </a:solidFill>
+          <a:ln>
+            <a:noFill/>
+          </a:ln>
+        </p:spPr>
+        <p:style>
+          <a:lnRef idx="1">
+            <a:schemeClr val="accent1"/>
+          </a:lnRef>
+          <a:fillRef idx="3">
+            <a:schemeClr val="accent1"/>
+          </a:fillRef>
+          <a:effectRef idx="2">
+            <a:schemeClr val="accent1"/>
+          </a:effectRef>
+          <a:fontRef idx="minor">
+            <a:schemeClr val="lt1"/>
+          </a:fontRef>
+        </p:style>
+        <p:txBody>
+          <a:bodyPr rtlCol="0" anchor="ctr"/>
+          <a:lstStyle/>
+          <a:p>
+            <a:pPr algn="ctr"/>
+            <a:endParaRPr/>
+          </a:p>
+        </p:txBody>
+      </p:sp>
+      <p:sp>
+        <p:nvSpPr>
+          <p:cNvPr id="7" name="TextBox 6"/>
+          <p:cNvSpPr txBox="1"/>
+          <p:nvPr/>
+        </p:nvSpPr>
+        <p:spPr>
+          <a:xfrm>
+            <a:off x="502920" y="1371600"/>
+            <a:ext cx="11183112" cy="276999"/>
+          </a:xfrm>
+          <a:prstGeom prst="rect">
+            <a:avLst/>
+          </a:prstGeom>
+          <a:noFill/>
+        </p:spPr>
+        <p:txBody>
+          <a:bodyPr wrap="square">
+            <a:spAutoFit/>
+          </a:bodyPr>
+          <a:lstStyle/>
+          <a:p>
+            <a:pPr algn="l"/>
+            <a:r>
+              <a:rPr sz="1200" b="0" dirty="0">
+                <a:solidFill>
+                  <a:srgbClr val="FFFFFF"/>
+                </a:solidFill>
+              </a:rPr>
+              <a:t>Research question:  Does adding IMF Article IV staff report text improve macroeconomic forecasts over a numerical-only baseline?</a:t>
+            </a:r>
+          </a:p>
+        </p:txBody>
+      </p:sp>
+      <p:sp>
+        <p:nvSpPr>
+          <p:cNvPr id="8" name="Rectangle 7"/>
+          <p:cNvSpPr/>
+          <p:nvPr/>
+        </p:nvSpPr>
+        <p:spPr>
+          <a:xfrm>
+            <a:off x="365760" y="2103120"/>
+            <a:ext cx="5669280" cy="347472"/>
+          </a:xfrm>
+          <a:prstGeom prst="rect">
+            <a:avLst/>
+          </a:prstGeom>
+          <a:solidFill>
+            <a:srgbClr val="2D4A7A"/>
+          </a:solidFill>
+          <a:ln>
+            <a:noFill/>
+          </a:ln>
+        </p:spPr>
+        <p:style>
+          <a:lnRef idx="1">
+            <a:schemeClr val="accent1"/>
+          </a:lnRef>
+          <a:fillRef idx="3">
+            <a:schemeClr val="accent1"/>
+          </a:fillRef>
+          <a:effectRef idx="2">
+            <a:schemeClr val="accent1"/>
+          </a:effectRef>
+          <a:fontRef idx="minor">
+            <a:schemeClr val="lt1"/>
+          </a:fontRef>
+        </p:style>
+        <p:txBody>
+          <a:bodyPr rtlCol="0" anchor="ctr"/>
+          <a:lstStyle/>
+          <a:p>
+            <a:pPr algn="ctr"/>
+            <a:endParaRPr/>
+          </a:p>
+        </p:txBody>
+      </p:sp>
+      <p:sp>
+        <p:nvSpPr>
+          <p:cNvPr id="9" name="TextBox 8"/>
+          <p:cNvSpPr txBox="1"/>
+          <p:nvPr/>
+        </p:nvSpPr>
+        <p:spPr>
+          <a:xfrm>
+            <a:off x="475488" y="2148839"/>
+            <a:ext cx="5486400" cy="274320"/>
+          </a:xfrm>
+          <a:prstGeom prst="rect">
+            <a:avLst/>
+          </a:prstGeom>
+          <a:noFill/>
+        </p:spPr>
+        <p:txBody>
+          <a:bodyPr wrap="square">
+            <a:spAutoFit/>
+          </a:bodyPr>
+          <a:lstStyle/>
+          <a:p>
+            <a:pPr algn="l"/>
+            <a:r>
+              <a:rPr sz="1000" b="1" i="0">
+                <a:solidFill>
+                  <a:srgbClr val="FFFFFF"/>
+                </a:solidFill>
+              </a:rPr>
+              <a:t>DATA STREAMS</a:t>
+            </a:r>
+          </a:p>
+        </p:txBody>
+      </p:sp>
+      <p:sp>
+        <p:nvSpPr>
+          <p:cNvPr id="10" name="TextBox 9"/>
+          <p:cNvSpPr txBox="1"/>
+          <p:nvPr/>
+        </p:nvSpPr>
+        <p:spPr>
+          <a:xfrm>
+            <a:off x="457200" y="2514600"/>
+            <a:ext cx="5486400" cy="1554480"/>
+          </a:xfrm>
+          <a:prstGeom prst="rect">
+            <a:avLst/>
+          </a:prstGeom>
+          <a:noFill/>
+        </p:spPr>
+        <p:txBody>
+          <a:bodyPr wrap="square">
+            <a:spAutoFit/>
+          </a:bodyPr>
+          <a:lstStyle/>
+          <a:p>
+            <a:pPr algn="l"/>
+            <a:r>
+              <a:rPr sz="1050" b="0">
+                <a:solidFill>
+                  <a:srgbClr val="F0F4F8"/>
+                </a:solidFill>
+              </a:rPr>
+              <a:t>① World Bank WDI  — 7 annual macro indicators per country</a:t>
+            </a:r>
+          </a:p>
+          <a:p>
+            <a:pPr algn="l"/>
+            <a:r>
+              <a:rPr sz="1050" b="0">
+                <a:solidFill>
+                  <a:srgbClr val="F0F4F8"/>
+                </a:solidFill>
+              </a:rPr>
+              <a:t>    GDP growth, inflation, current account, fiscal balance,</a:t>
+            </a:r>
+          </a:p>
+          <a:p>
+            <a:pPr algn="l"/>
+            <a:r>
+              <a:rPr sz="1050" b="0">
+                <a:solidFill>
+                  <a:srgbClr val="F0F4F8"/>
+                </a:solidFill>
+              </a:rPr>
+              <a:t>    remittances, unemployment, government debt  (2005–2023)</a:t>
+            </a:r>
+          </a:p>
+          <a:p>
+            <a:pPr algn="l"/>
+            <a:endParaRPr sz="1050" b="0">
+              <a:solidFill>
+                <a:srgbClr val="F0F4F8"/>
+              </a:solidFill>
+            </a:endParaRPr>
+          </a:p>
+          <a:p>
+            <a:pPr algn="l"/>
+            <a:r>
+              <a:rPr sz="1050" b="0">
+                <a:solidFill>
+                  <a:srgbClr val="F0F4F8"/>
+                </a:solidFill>
+              </a:rPr>
+              <a:t>② IMF Article IV staff reports  — qualitative economic assessment</a:t>
+            </a:r>
+          </a:p>
+          <a:p>
+            <a:pPr algn="l"/>
+            <a:r>
+              <a:rPr sz="1050" b="0">
+                <a:solidFill>
+                  <a:srgbClr val="F0F4F8"/>
+                </a:solidFill>
+              </a:rPr>
+              <a:t>    Published 3–8 months after the reference year</a:t>
+            </a:r>
+          </a:p>
+          <a:p>
+            <a:pPr algn="l"/>
+            <a:r>
+              <a:rPr sz="1050" b="0">
+                <a:solidFill>
+                  <a:srgbClr val="F0F4F8"/>
+                </a:solidFill>
+              </a:rPr>
+              <a:t>    240 real texts extracted  ·  57 % coverage across 22 countries</a:t>
+            </a:r>
+          </a:p>
+        </p:txBody>
+      </p:sp>
+      <p:sp>
+        <p:nvSpPr>
+          <p:cNvPr id="11" name="Rectangle 10"/>
+          <p:cNvSpPr/>
+          <p:nvPr/>
+        </p:nvSpPr>
+        <p:spPr>
+          <a:xfrm>
+            <a:off x="365760" y="4206240"/>
+            <a:ext cx="5669280" cy="347472"/>
+          </a:xfrm>
+          <a:prstGeom prst="rect">
+            <a:avLst/>
+          </a:prstGeom>
+          <a:solidFill>
+            <a:srgbClr val="2D4A7A"/>
+          </a:solidFill>
+          <a:ln>
+            <a:noFill/>
+          </a:ln>
+        </p:spPr>
+        <p:style>
+          <a:lnRef idx="1">
+            <a:schemeClr val="accent1"/>
+          </a:lnRef>
+          <a:fillRef idx="3">
+            <a:schemeClr val="accent1"/>
+          </a:fillRef>
+          <a:effectRef idx="2">
+            <a:schemeClr val="accent1"/>
+          </a:effectRef>
+          <a:fontRef idx="minor">
+            <a:schemeClr val="lt1"/>
+          </a:fontRef>
+        </p:style>
+        <p:txBody>
+          <a:bodyPr rtlCol="0" anchor="ctr"/>
+          <a:lstStyle/>
+          <a:p>
+            <a:pPr algn="ctr"/>
+            <a:endParaRPr/>
+          </a:p>
+        </p:txBody>
+      </p:sp>
+      <p:sp>
+        <p:nvSpPr>
+          <p:cNvPr id="12" name="TextBox 11"/>
+          <p:cNvSpPr txBox="1"/>
+          <p:nvPr/>
+        </p:nvSpPr>
+        <p:spPr>
+          <a:xfrm>
+            <a:off x="475488" y="4251960"/>
+            <a:ext cx="5486400" cy="274320"/>
+          </a:xfrm>
+          <a:prstGeom prst="rect">
+            <a:avLst/>
+          </a:prstGeom>
+          <a:noFill/>
+        </p:spPr>
+        <p:txBody>
+          <a:bodyPr wrap="square">
+            <a:spAutoFit/>
+          </a:bodyPr>
+          <a:lstStyle/>
+          <a:p>
+            <a:pPr algn="l"/>
+            <a:r>
+              <a:rPr sz="1000" b="1" i="0">
+                <a:solidFill>
+                  <a:srgbClr val="FFFFFF"/>
+                </a:solidFill>
+              </a:rPr>
+              <a:t>COUNTRIES  (22 total)</a:t>
+            </a:r>
+          </a:p>
+        </p:txBody>
+      </p:sp>
+      <p:sp>
+        <p:nvSpPr>
+          <p:cNvPr id="13" name="TextBox 12"/>
+          <p:cNvSpPr txBox="1"/>
+          <p:nvPr/>
+        </p:nvSpPr>
+        <p:spPr>
+          <a:xfrm>
+            <a:off x="457200" y="4617720"/>
+            <a:ext cx="5486400" cy="1005840"/>
+          </a:xfrm>
+          <a:prstGeom prst="rect">
+            <a:avLst/>
+          </a:prstGeom>
+          <a:noFill/>
+        </p:spPr>
+        <p:txBody>
+          <a:bodyPr wrap="square">
+            <a:spAutoFit/>
+          </a:bodyPr>
+          <a:lstStyle/>
+          <a:p>
+            <a:pPr algn="l"/>
+            <a:r>
+              <a:rPr sz="1050" b="0">
+                <a:solidFill>
+                  <a:srgbClr val="F0F4F8"/>
+                </a:solidFill>
+              </a:rPr>
+              <a:t>Central Asia: KAZ  KGZ  TJK  TKM  UZB  AZE  ARM  GEO  MDA  BLR  UKR  MNG</a:t>
+            </a:r>
+          </a:p>
+          <a:p>
+            <a:pPr algn="l"/>
+            <a:r>
+              <a:rPr sz="1050" b="0">
+                <a:solidFill>
+                  <a:srgbClr val="F0F4F8"/>
+                </a:solidFill>
+              </a:rPr>
+              <a:t>Eastern Europe: ALB  BIH  MKD  SRB  TUR  ROU  BGR  HRV</a:t>
+            </a:r>
+          </a:p>
+          <a:p>
+            <a:pPr algn="l"/>
+            <a:r>
+              <a:rPr sz="1050" b="0">
+                <a:solidFill>
+                  <a:srgbClr val="F0F4F8"/>
+                </a:solidFill>
+              </a:rPr>
+              <a:t>Anchors: USA  JPN</a:t>
+            </a:r>
+          </a:p>
+        </p:txBody>
+      </p:sp>
+      <p:sp>
+        <p:nvSpPr>
+          <p:cNvPr id="14" name="Rectangle 13"/>
+          <p:cNvSpPr/>
+          <p:nvPr/>
+        </p:nvSpPr>
+        <p:spPr>
+          <a:xfrm>
+            <a:off x="6309360" y="2103120"/>
+            <a:ext cx="5669280" cy="347472"/>
+          </a:xfrm>
+          <a:prstGeom prst="rect">
+            <a:avLst/>
+          </a:prstGeom>
+          <a:solidFill>
+            <a:srgbClr val="2D4A7A"/>
+          </a:solidFill>
+          <a:ln>
+            <a:noFill/>
+          </a:ln>
+        </p:spPr>
+        <p:style>
+          <a:lnRef idx="1">
+            <a:schemeClr val="accent1"/>
+          </a:lnRef>
+          <a:fillRef idx="3">
+            <a:schemeClr val="accent1"/>
+          </a:fillRef>
+          <a:effectRef idx="2">
+            <a:schemeClr val="accent1"/>
+          </a:effectRef>
+          <a:fontRef idx="minor">
+            <a:schemeClr val="lt1"/>
+          </a:fontRef>
+        </p:style>
+        <p:txBody>
+          <a:bodyPr rtlCol="0" anchor="ctr"/>
+          <a:lstStyle/>
+          <a:p>
+            <a:pPr algn="ctr"/>
+            <a:endParaRPr/>
+          </a:p>
+        </p:txBody>
+      </p:sp>
+      <p:sp>
+        <p:nvSpPr>
+          <p:cNvPr id="15" name="TextBox 14"/>
+          <p:cNvSpPr txBox="1"/>
+          <p:nvPr/>
+        </p:nvSpPr>
+        <p:spPr>
+          <a:xfrm>
+            <a:off x="6419088" y="2148839"/>
+            <a:ext cx="5486400" cy="274320"/>
+          </a:xfrm>
+          <a:prstGeom prst="rect">
+            <a:avLst/>
+          </a:prstGeom>
+          <a:noFill/>
+        </p:spPr>
+        <p:txBody>
+          <a:bodyPr wrap="square">
+            <a:spAutoFit/>
+          </a:bodyPr>
+          <a:lstStyle/>
+          <a:p>
+            <a:pPr algn="l"/>
+            <a:r>
+              <a:rPr sz="1000" b="1" i="0">
+                <a:solidFill>
+                  <a:srgbClr val="FFFFFF"/>
+                </a:solidFill>
+              </a:rPr>
+              <a:t>MODELS</a:t>
+            </a:r>
+          </a:p>
+        </p:txBody>
+      </p:sp>
+      <p:sp>
+        <p:nvSpPr>
+          <p:cNvPr id="16" name="TextBox 15"/>
+          <p:cNvSpPr txBox="1"/>
+          <p:nvPr/>
+        </p:nvSpPr>
+        <p:spPr>
+          <a:xfrm>
+            <a:off x="6400800" y="2514600"/>
+            <a:ext cx="5486400" cy="1645920"/>
+          </a:xfrm>
+          <a:prstGeom prst="rect">
+            <a:avLst/>
+          </a:prstGeom>
+          <a:noFill/>
+        </p:spPr>
+        <p:txBody>
+          <a:bodyPr wrap="square">
+            <a:spAutoFit/>
+          </a:bodyPr>
+          <a:lstStyle/>
+          <a:p>
+            <a:pPr algn="l"/>
+            <a:r>
+              <a:rPr sz="1050" b="0">
+                <a:solidFill>
+                  <a:srgbClr val="F0F4F8"/>
+                </a:solidFill>
+              </a:rPr>
+              <a:t>DLinear  —  trend decomposition + linear projection</a:t>
+            </a:r>
+          </a:p>
+          <a:p>
+            <a:pPr algn="l"/>
+            <a:r>
+              <a:rPr sz="1050" b="0">
+                <a:solidFill>
+                  <a:srgbClr val="F0F4F8"/>
+                </a:solidFill>
+              </a:rPr>
+              <a:t>    Unimodal baseline (numbers only)</a:t>
+            </a:r>
+          </a:p>
+          <a:p>
+            <a:pPr algn="l"/>
+            <a:endParaRPr sz="1050" b="0">
+              <a:solidFill>
+                <a:srgbClr val="F0F4F8"/>
+              </a:solidFill>
+            </a:endParaRPr>
+          </a:p>
+          <a:p>
+            <a:pPr algn="l"/>
+            <a:r>
+              <a:rPr sz="1050" b="0">
+                <a:solidFill>
+                  <a:srgbClr val="F0F4F8"/>
+                </a:solidFill>
+              </a:rPr>
+              <a:t>NumericalGRU  —  GRU over WDI time series</a:t>
+            </a:r>
+          </a:p>
+          <a:p>
+            <a:pPr algn="l"/>
+            <a:r>
+              <a:rPr sz="1050" b="0">
+                <a:solidFill>
+                  <a:srgbClr val="F0F4F8"/>
+                </a:solidFill>
+              </a:rPr>
+              <a:t>    Unimodal ablation: temporal dynamics without text</a:t>
+            </a:r>
+          </a:p>
+          <a:p>
+            <a:pPr algn="l"/>
+            <a:endParaRPr sz="1050" b="0">
+              <a:solidFill>
+                <a:srgbClr val="F0F4F8"/>
+              </a:solidFill>
+            </a:endParaRPr>
+          </a:p>
+          <a:p>
+            <a:pPr algn="l"/>
+            <a:r>
+              <a:rPr sz="1050" b="0">
+                <a:solidFill>
+                  <a:srgbClr val="F0F4F8"/>
+                </a:solidFill>
+              </a:rPr>
+              <a:t>GR-Add MMF  —  GRU + RecAvg TTF + gated text fusion</a:t>
+            </a:r>
+          </a:p>
+          <a:p>
+            <a:pPr algn="l"/>
+            <a:r>
+              <a:rPr sz="1050" b="0">
+                <a:solidFill>
+                  <a:srgbClr val="F0F4F8"/>
+                </a:solidFill>
+              </a:rPr>
+              <a:t>    Full multimodal model (numbers + Article IV text)</a:t>
+            </a:r>
+          </a:p>
+        </p:txBody>
+      </p:sp>
+      <p:sp>
+        <p:nvSpPr>
+          <p:cNvPr id="17" name="Rectangle 16"/>
+          <p:cNvSpPr/>
+          <p:nvPr/>
+        </p:nvSpPr>
+        <p:spPr>
+          <a:xfrm>
+            <a:off x="6309360" y="4206240"/>
+            <a:ext cx="5669280" cy="347472"/>
+          </a:xfrm>
+          <a:prstGeom prst="rect">
+            <a:avLst/>
+          </a:prstGeom>
+          <a:solidFill>
+            <a:srgbClr val="2D4A7A"/>
+          </a:solidFill>
+          <a:ln>
+            <a:noFill/>
+          </a:ln>
+        </p:spPr>
+        <p:style>
+          <a:lnRef idx="1">
+            <a:schemeClr val="accent1"/>
+          </a:lnRef>
+          <a:fillRef idx="3">
+            <a:schemeClr val="accent1"/>
+          </a:fillRef>
+          <a:effectRef idx="2">
+            <a:schemeClr val="accent1"/>
+          </a:effectRef>
+          <a:fontRef idx="minor">
+            <a:schemeClr val="lt1"/>
+          </a:fontRef>
+        </p:style>
+        <p:txBody>
+          <a:bodyPr rtlCol="0" anchor="ctr"/>
+          <a:lstStyle/>
+          <a:p>
+            <a:pPr algn="ctr"/>
+            <a:endParaRPr/>
+          </a:p>
+        </p:txBody>
+      </p:sp>
+      <p:sp>
+        <p:nvSpPr>
+          <p:cNvPr id="18" name="TextBox 17"/>
+          <p:cNvSpPr txBox="1"/>
+          <p:nvPr/>
+        </p:nvSpPr>
+        <p:spPr>
+          <a:xfrm>
+            <a:off x="6419088" y="4251960"/>
+            <a:ext cx="5486400" cy="274320"/>
+          </a:xfrm>
+          <a:prstGeom prst="rect">
+            <a:avLst/>
+          </a:prstGeom>
+          <a:noFill/>
+        </p:spPr>
+        <p:txBody>
+          <a:bodyPr wrap="square">
+            <a:spAutoFit/>
+          </a:bodyPr>
+          <a:lstStyle/>
+          <a:p>
+            <a:pPr algn="l"/>
+            <a:r>
+              <a:rPr sz="1000" b="1" i="0">
+                <a:solidFill>
+                  <a:srgbClr val="FFFFFF"/>
+                </a:solidFill>
+              </a:rPr>
+              <a:t>EVALUATION</a:t>
+            </a:r>
+          </a:p>
+        </p:txBody>
+      </p:sp>
+      <p:sp>
+        <p:nvSpPr>
+          <p:cNvPr id="19" name="TextBox 18"/>
+          <p:cNvSpPr txBox="1"/>
+          <p:nvPr/>
+        </p:nvSpPr>
+        <p:spPr>
+          <a:xfrm>
+            <a:off x="6400800" y="4617720"/>
+            <a:ext cx="5486400" cy="1005840"/>
+          </a:xfrm>
+          <a:prstGeom prst="rect">
+            <a:avLst/>
+          </a:prstGeom>
+          <a:noFill/>
+        </p:spPr>
+        <p:txBody>
+          <a:bodyPr wrap="square">
+            <a:spAutoFit/>
+          </a:bodyPr>
+          <a:lstStyle/>
+          <a:p>
+            <a:pPr algn="l"/>
+            <a:r>
+              <a:rPr sz="1050" b="0">
+                <a:solidFill>
+                  <a:srgbClr val="F0F4F8"/>
+                </a:solidFill>
+              </a:rPr>
+              <a:t>Targets: next-year GDP growth  ·  next-year CPI inflation</a:t>
+            </a:r>
+          </a:p>
+          <a:p>
+            <a:pPr algn="l"/>
+            <a:r>
+              <a:rPr sz="1050" b="0">
+                <a:solidFill>
+                  <a:srgbClr val="F0F4F8"/>
+                </a:solidFill>
+              </a:rPr>
+              <a:t>Train 2005–2019  |  Val 2020–2021  |  Test 2022–2023</a:t>
+            </a:r>
+          </a:p>
+          <a:p>
+            <a:pPr algn="l"/>
+            <a:r>
+              <a:rPr sz="1050" b="0">
+                <a:solidFill>
+                  <a:srgbClr val="F0F4F8"/>
+                </a:solidFill>
+              </a:rPr>
+              <a:t>Metric: MSE on held-out test years</a:t>
+            </a:r>
+          </a:p>
+        </p:txBody>
+      </p:sp>
+      <p:sp>
+        <p:nvSpPr>
+          <p:cNvPr id="20" name="TextBox 19"/>
+          <p:cNvSpPr txBox="1"/>
+          <p:nvPr/>
+        </p:nvSpPr>
+        <p:spPr>
+          <a:xfrm>
+            <a:off x="365760" y="6492240"/>
+            <a:ext cx="11457432" cy="256032"/>
+          </a:xfrm>
+          <a:prstGeom prst="rect">
+            <a:avLst/>
+          </a:prstGeom>
+          <a:noFill/>
+        </p:spPr>
+        <p:txBody>
+          <a:bodyPr wrap="square">
+            <a:spAutoFit/>
+          </a:bodyPr>
+          <a:lstStyle/>
+          <a:p>
+            <a:pPr algn="ctr"/>
+            <a:r>
+              <a:rPr sz="800" b="0" i="0">
+                <a:solidFill>
+                  <a:srgbClr val="888888"/>
+                </a:solidFill>
+              </a:rPr>
+              <a:t>STAT 8240 Data Mining II  ·  Kennesaw State University  ·  Track B Application of Existing Methods to New Datasets</a:t>
+            </a:r>
+          </a:p>
+        </p:txBody>
+      </p:sp>
+    </p:spTree>
+  </p:cSld>
+  <p:clrMapOvr>
+    <a:masterClrMapping/>
+  </p:clrMapOvr>
+</p:sld>
+</file>
+
+<file path=ppt/slides/slide2.xml><?xml version="1.0" encoding="utf-8"?>
+<p:sld xmlns:a="http://schemas.openxmlformats.org/drawingml/2006/main" xmlns:r="http://schemas.openxmlformats.org/officeDocument/2006/relationships" xmlns:p="http://schemas.openxmlformats.org/presentationml/2006/main">
+  <p:cSld>
     <p:bg>
       <p:bgPr>
         <a:solidFill>
@@ -3696,7 +4805,7 @@
         <p:spPr>
           <a:xfrm>
             <a:off x="365760" y="109728"/>
-            <a:ext cx="11430000" cy="594360"/>
+            <a:ext cx="11430000" cy="523220"/>
           </a:xfrm>
           <a:prstGeom prst="rect">
             <a:avLst/>
@@ -3711,12 +4820,12 @@
           <a:p>
             <a:pPr algn="l"/>
             <a:r>
-              <a:rPr sz="2800" b="1">
+              <a:rPr sz="2800" b="1" dirty="0">
                 <a:solidFill>
                   <a:srgbClr val="FFFFFF"/>
                 </a:solidFill>
               </a:rPr>
-              <a:t>Week 2 Progress: Real Data Pipeline Complete</a:t>
+              <a:t>Progress: Real Data Pipeline Complete</a:t>
             </a:r>
           </a:p>
         </p:txBody>
@@ -5107,7 +6216,7 @@
 </p:sld>
 </file>
 
-<file path=ppt/slides/slide2.xml><?xml version="1.0" encoding="utf-8"?>
+<file path=ppt/slides/slide3.xml><?xml version="1.0" encoding="utf-8"?>
 <p:sld xmlns:a="http://schemas.openxmlformats.org/drawingml/2006/main" xmlns:r="http://schemas.openxmlformats.org/officeDocument/2006/relationships" xmlns:p="http://schemas.openxmlformats.org/presentationml/2006/main">
   <p:cSld>
     <p:bg>
@@ -6795,44 +7904,44 @@
         <a:sysClr val="window" lastClr="FFFFFF"/>
       </a:lt1>
       <a:dk2>
-        <a:srgbClr val="1F497D"/>
+        <a:srgbClr val="0E2841"/>
       </a:dk2>
       <a:lt2>
-        <a:srgbClr val="EEECE1"/>
+        <a:srgbClr val="E8E8E8"/>
       </a:lt2>
       <a:accent1>
-        <a:srgbClr val="4F81BD"/>
+        <a:srgbClr val="156082"/>
       </a:accent1>
       <a:accent2>
-        <a:srgbClr val="C0504D"/>
+        <a:srgbClr val="E97132"/>
       </a:accent2>
       <a:accent3>
-        <a:srgbClr val="9BBB59"/>
+        <a:srgbClr val="196B24"/>
       </a:accent3>
       <a:accent4>
-        <a:srgbClr val="8064A2"/>
+        <a:srgbClr val="0F9ED5"/>
       </a:accent4>
       <a:accent5>
-        <a:srgbClr val="4BACC6"/>
+        <a:srgbClr val="A02B93"/>
       </a:accent5>
       <a:accent6>
-        <a:srgbClr val="F79646"/>
+        <a:srgbClr val="4EA72E"/>
       </a:accent6>
       <a:hlink>
-        <a:srgbClr val="0000FF"/>
+        <a:srgbClr val="467886"/>
       </a:hlink>
       <a:folHlink>
-        <a:srgbClr val="800080"/>
+        <a:srgbClr val="96607D"/>
       </a:folHlink>
     </a:clrScheme>
     <a:fontScheme name="Office">
       <a:majorFont>
-        <a:latin typeface="Calibri"/>
+        <a:latin typeface="Aptos Display" panose="02110004020202020204"/>
         <a:ea typeface=""/>
         <a:cs typeface=""/>
-        <a:font script="Jpan" typeface="ＭＳ Ｐゴシック"/>
+        <a:font script="Jpan" typeface="游ゴシック Light"/>
         <a:font script="Hang" typeface="맑은 고딕"/>
-        <a:font script="Hans" typeface="宋体"/>
+        <a:font script="Hans" typeface="等线 Light"/>
         <a:font script="Hant" typeface="新細明體"/>
         <a:font script="Arab" typeface="Times New Roman"/>
         <a:font script="Hebr" typeface="Times New Roman"/>
@@ -6860,14 +7969,31 @@
         <a:font script="Viet" typeface="Times New Roman"/>
         <a:font script="Uigh" typeface="Microsoft Uighur"/>
         <a:font script="Geor" typeface="Sylfaen"/>
+        <a:font script="Armn" typeface="Arial"/>
+        <a:font script="Bugi" typeface="Leelawadee UI"/>
+        <a:font script="Bopo" typeface="Microsoft JhengHei"/>
+        <a:font script="Java" typeface="Javanese Text"/>
+        <a:font script="Lisu" typeface="Segoe UI"/>
+        <a:font script="Mymr" typeface="Myanmar Text"/>
+        <a:font script="Nkoo" typeface="Ebrima"/>
+        <a:font script="Olck" typeface="Nirmala UI"/>
+        <a:font script="Osma" typeface="Ebrima"/>
+        <a:font script="Phag" typeface="Phagspa"/>
+        <a:font script="Syrn" typeface="Estrangelo Edessa"/>
+        <a:font script="Syrj" typeface="Estrangelo Edessa"/>
+        <a:font script="Syre" typeface="Estrangelo Edessa"/>
+        <a:font script="Sora" typeface="Nirmala UI"/>
+        <a:font script="Tale" typeface="Microsoft Tai Le"/>
+        <a:font script="Talu" typeface="Microsoft New Tai Lue"/>
+        <a:font script="Tfng" typeface="Ebrima"/>
       </a:majorFont>
       <a:minorFont>
-        <a:latin typeface="Calibri"/>
+        <a:latin typeface="Aptos" panose="02110004020202020204"/>
         <a:ea typeface=""/>
         <a:cs typeface=""/>
-        <a:font script="Jpan" typeface="ＭＳ Ｐゴシック"/>
+        <a:font script="Jpan" typeface="游ゴシック"/>
         <a:font script="Hang" typeface="맑은 고딕"/>
-        <a:font script="Hans" typeface="宋体"/>
+        <a:font script="Hans" typeface="等线"/>
         <a:font script="Hant" typeface="新細明體"/>
         <a:font script="Arab" typeface="Arial"/>
         <a:font script="Hebr" typeface="Arial"/>
@@ -6895,6 +8021,23 @@
         <a:font script="Viet" typeface="Arial"/>
         <a:font script="Uigh" typeface="Microsoft Uighur"/>
         <a:font script="Geor" typeface="Sylfaen"/>
+        <a:font script="Armn" typeface="Arial"/>
+        <a:font script="Bugi" typeface="Leelawadee UI"/>
+        <a:font script="Bopo" typeface="Microsoft JhengHei"/>
+        <a:font script="Java" typeface="Javanese Text"/>
+        <a:font script="Lisu" typeface="Segoe UI"/>
+        <a:font script="Mymr" typeface="Myanmar Text"/>
+        <a:font script="Nkoo" typeface="Ebrima"/>
+        <a:font script="Olck" typeface="Nirmala UI"/>
+        <a:font script="Osma" typeface="Ebrima"/>
+        <a:font script="Phag" typeface="Phagspa"/>
+        <a:font script="Syrn" typeface="Estrangelo Edessa"/>
+        <a:font script="Syrj" typeface="Estrangelo Edessa"/>
+        <a:font script="Syre" typeface="Estrangelo Edessa"/>
+        <a:font script="Sora" typeface="Nirmala UI"/>
+        <a:font script="Tale" typeface="Microsoft Tai Le"/>
+        <a:font script="Talu" typeface="Microsoft New Tai Lue"/>
+        <a:font script="Tfng" typeface="Ebrima"/>
       </a:minorFont>
     </a:fontScheme>
     <a:fmtScheme name="Office">
@@ -6906,180 +8049,136 @@
           <a:gsLst>
             <a:gs pos="0">
               <a:schemeClr val="phClr">
-                <a:tint val="50000"/>
-                <a:satMod val="300000"/>
+                <a:lumMod val="110000"/>
+                <a:satMod val="105000"/>
+                <a:tint val="67000"/>
               </a:schemeClr>
             </a:gs>
-            <a:gs pos="35000">
+            <a:gs pos="50000">
               <a:schemeClr val="phClr">
-                <a:tint val="37000"/>
-                <a:satMod val="300000"/>
+                <a:lumMod val="105000"/>
+                <a:satMod val="103000"/>
+                <a:tint val="73000"/>
               </a:schemeClr>
             </a:gs>
             <a:gs pos="100000">
               <a:schemeClr val="phClr">
-                <a:tint val="15000"/>
-                <a:satMod val="350000"/>
+                <a:lumMod val="105000"/>
+                <a:satMod val="109000"/>
+                <a:tint val="81000"/>
               </a:schemeClr>
             </a:gs>
           </a:gsLst>
-          <a:lin ang="16200000" scaled="1"/>
+          <a:lin ang="5400000" scaled="0"/>
         </a:gradFill>
         <a:gradFill rotWithShape="1">
           <a:gsLst>
             <a:gs pos="0">
               <a:schemeClr val="phClr">
-                <a:tint val="100000"/>
+                <a:satMod val="103000"/>
+                <a:lumMod val="102000"/>
+                <a:tint val="94000"/>
+              </a:schemeClr>
+            </a:gs>
+            <a:gs pos="50000">
+              <a:schemeClr val="phClr">
+                <a:satMod val="110000"/>
+                <a:lumMod val="100000"/>
                 <a:shade val="100000"/>
-                <a:satMod val="130000"/>
               </a:schemeClr>
             </a:gs>
             <a:gs pos="100000">
               <a:schemeClr val="phClr">
-                <a:tint val="50000"/>
-                <a:shade val="100000"/>
-                <a:satMod val="350000"/>
+                <a:lumMod val="99000"/>
+                <a:satMod val="120000"/>
+                <a:shade val="78000"/>
               </a:schemeClr>
             </a:gs>
           </a:gsLst>
-          <a:lin ang="16200000" scaled="0"/>
+          <a:lin ang="5400000" scaled="0"/>
         </a:gradFill>
       </a:fillStyleLst>
       <a:lnStyleLst>
-        <a:ln w="9525" cap="flat" cmpd="sng" algn="ctr">
+        <a:ln w="12700" cap="flat" cmpd="sng" algn="ctr">
           <a:solidFill>
-            <a:schemeClr val="phClr">
-              <a:shade val="95000"/>
-              <a:satMod val="105000"/>
-            </a:schemeClr>
+            <a:schemeClr val="phClr"/>
           </a:solidFill>
           <a:prstDash val="solid"/>
+          <a:miter lim="800000"/>
+        </a:ln>
+        <a:ln w="19050" cap="flat" cmpd="sng" algn="ctr">
+          <a:solidFill>
+            <a:schemeClr val="phClr"/>
+          </a:solidFill>
+          <a:prstDash val="solid"/>
+          <a:miter lim="800000"/>
         </a:ln>
         <a:ln w="25400" cap="flat" cmpd="sng" algn="ctr">
           <a:solidFill>
             <a:schemeClr val="phClr"/>
           </a:solidFill>
           <a:prstDash val="solid"/>
-        </a:ln>
-        <a:ln w="38100" cap="flat" cmpd="sng" algn="ctr">
-          <a:solidFill>
-            <a:schemeClr val="phClr"/>
-          </a:solidFill>
-          <a:prstDash val="solid"/>
+          <a:miter lim="800000"/>
         </a:ln>
       </a:lnStyleLst>
       <a:effectStyleLst>
         <a:effectStyle>
+          <a:effectLst/>
+        </a:effectStyle>
+        <a:effectStyle>
+          <a:effectLst/>
+        </a:effectStyle>
+        <a:effectStyle>
           <a:effectLst>
-            <a:outerShdw blurRad="40000" dist="20000" dir="5400000" rotWithShape="0">
+            <a:outerShdw blurRad="57150" dist="19050" dir="5400000" algn="ctr" rotWithShape="0">
               <a:srgbClr val="000000">
-                <a:alpha val="38000"/>
+                <a:alpha val="63000"/>
               </a:srgbClr>
             </a:outerShdw>
           </a:effectLst>
-        </a:effectStyle>
-        <a:effectStyle>
-          <a:effectLst>
-            <a:outerShdw blurRad="40000" dist="23000" dir="5400000" rotWithShape="0">
-              <a:srgbClr val="000000">
-                <a:alpha val="35000"/>
-              </a:srgbClr>
-            </a:outerShdw>
-          </a:effectLst>
-        </a:effectStyle>
-        <a:effectStyle>
-          <a:effectLst>
-            <a:outerShdw blurRad="40000" dist="23000" dir="5400000" rotWithShape="0">
-              <a:srgbClr val="000000">
-                <a:alpha val="35000"/>
-              </a:srgbClr>
-            </a:outerShdw>
-          </a:effectLst>
-          <a:scene3d>
-            <a:camera prst="orthographicFront">
-              <a:rot lat="0" lon="0" rev="0"/>
-            </a:camera>
-            <a:lightRig rig="threePt" dir="t">
-              <a:rot lat="0" lon="0" rev="1200000"/>
-            </a:lightRig>
-          </a:scene3d>
-          <a:sp3d>
-            <a:bevelT w="63500" h="25400"/>
-          </a:sp3d>
         </a:effectStyle>
       </a:effectStyleLst>
       <a:bgFillStyleLst>
         <a:solidFill>
           <a:schemeClr val="phClr"/>
         </a:solidFill>
+        <a:solidFill>
+          <a:schemeClr val="phClr">
+            <a:tint val="95000"/>
+            <a:satMod val="170000"/>
+          </a:schemeClr>
+        </a:solidFill>
         <a:gradFill rotWithShape="1">
           <a:gsLst>
             <a:gs pos="0">
               <a:schemeClr val="phClr">
-                <a:tint val="40000"/>
-                <a:satMod val="350000"/>
+                <a:tint val="93000"/>
+                <a:satMod val="150000"/>
+                <a:shade val="98000"/>
+                <a:lumMod val="102000"/>
               </a:schemeClr>
             </a:gs>
-            <a:gs pos="40000">
+            <a:gs pos="50000">
               <a:schemeClr val="phClr">
-                <a:tint val="45000"/>
-                <a:shade val="99000"/>
-                <a:satMod val="350000"/>
+                <a:tint val="98000"/>
+                <a:satMod val="130000"/>
+                <a:shade val="90000"/>
+                <a:lumMod val="103000"/>
               </a:schemeClr>
             </a:gs>
             <a:gs pos="100000">
               <a:schemeClr val="phClr">
-                <a:shade val="20000"/>
-                <a:satMod val="255000"/>
+                <a:shade val="63000"/>
+                <a:satMod val="120000"/>
               </a:schemeClr>
             </a:gs>
           </a:gsLst>
-          <a:path path="circle">
-            <a:fillToRect l="50000" t="-80000" r="50000" b="180000"/>
-          </a:path>
-        </a:gradFill>
-        <a:gradFill rotWithShape="1">
-          <a:gsLst>
-            <a:gs pos="0">
-              <a:schemeClr val="phClr">
-                <a:tint val="80000"/>
-                <a:satMod val="300000"/>
-              </a:schemeClr>
-            </a:gs>
-            <a:gs pos="100000">
-              <a:schemeClr val="phClr">
-                <a:shade val="30000"/>
-                <a:satMod val="200000"/>
-              </a:schemeClr>
-            </a:gs>
-          </a:gsLst>
-          <a:path path="circle">
-            <a:fillToRect l="50000" t="50000" r="50000" b="50000"/>
-          </a:path>
+          <a:lin ang="5400000" scaled="0"/>
         </a:gradFill>
       </a:bgFillStyleLst>
     </a:fmtScheme>
   </a:themeElements>
   <a:objectDefaults>
-    <a:spDef>
-      <a:spPr/>
-      <a:bodyPr/>
-      <a:lstStyle/>
-      <a:style>
-        <a:lnRef idx="1">
-          <a:schemeClr val="accent1"/>
-        </a:lnRef>
-        <a:fillRef idx="3">
-          <a:schemeClr val="accent1"/>
-        </a:fillRef>
-        <a:effectRef idx="2">
-          <a:schemeClr val="accent1"/>
-        </a:effectRef>
-        <a:fontRef idx="minor">
-          <a:schemeClr val="lt1"/>
-        </a:fontRef>
-      </a:style>
-    </a:spDef>
     <a:lnDef>
       <a:spPr/>
       <a:bodyPr/>
@@ -7101,5 +8200,10 @@
     </a:lnDef>
   </a:objectDefaults>
   <a:extraClrSchemeLst/>
+  <a:extLst>
+    <a:ext uri="{05A4C25C-085E-4340-85A3-A5531E510DB2}">
+      <thm15:themeFamily xmlns:thm15="http://schemas.microsoft.com/office/thememl/2012/main" name="Office Theme" id="{2E142A2C-CD16-42D6-873A-C26D2A0506FA}" vid="{1BDDFF52-6CD6-40A5-AB3C-68EB2F1E4D0A}"/>
+    </a:ext>
+  </a:extLst>
 </a:theme>
 </file>